--- a/projects/cns-pharmacology-practical/slides/ch09-local-anaesthetics.pptx
+++ b/projects/cns-pharmacology-practical/slides/ch09-local-anaesthetics.pptx
@@ -6812,7 +6812,7 @@
                 </a:solidFill>
                 <a:latin typeface="Calibri"/>
               </a:rPr>
-              <a:t>45 minutes  ·  10 questions</a:t>
+              <a:t>60 minutes  ·  10 questions</a:t>
             </a:r>
           </a:p>
         </p:txBody>
@@ -12939,7 +12939,7 @@
                 </a:solidFill>
                 <a:latin typeface="Cambria"/>
               </a:rPr>
-              <a:t>45</a:t>
+              <a:t>60</a:t>
             </a:r>
           </a:p>
           <a:p>

--- a/projects/cns-pharmacology-practical/slides/ch09-local-anaesthetics.pptx
+++ b/projects/cns-pharmacology-practical/slides/ch09-local-anaesthetics.pptx
@@ -5880,14 +5880,177 @@
       </p:pic>
       <p:sp>
         <p:nvSpPr>
-          <p:cNvPr id="11" name="TextBox 10"/>
+          <p:cNvPr id="11" name="Rounded Rectangle 10"/>
+          <p:cNvSpPr/>
+          <p:nvPr/>
+        </p:nvSpPr>
+        <p:spPr>
+          <a:xfrm>
+            <a:off x="411479" y="1444752"/>
+            <a:ext cx="11368735" cy="4800600"/>
+          </a:xfrm>
+          <a:prstGeom prst="roundRect">
+            <a:avLst>
+              <a:gd name="adj" fmla="val 4000"/>
+            </a:avLst>
+          </a:prstGeom>
+          <a:solidFill>
+            <a:srgbClr val="FFFFFF">
+              <a:alpha val="84000"/>
+            </a:srgbClr>
+          </a:solidFill>
+          <a:ln w="19050">
+            <a:solidFill>
+              <a:srgbClr val="FFFFFF"/>
+            </a:solidFill>
+          </a:ln>
+          <a:effectLst>
+            <a:outerShdw blurRad="203200" dist="50800" dir="5400000" algn="t" rotWithShape="0">
+              <a:srgbClr val="1A2340">
+                <a:alpha val="20000"/>
+              </a:srgbClr>
+            </a:outerShdw>
+          </a:effectLst>
+        </p:spPr>
+        <p:style>
+          <a:lnRef idx="1">
+            <a:schemeClr val="accent1"/>
+          </a:lnRef>
+          <a:fillRef idx="3">
+            <a:schemeClr val="accent1"/>
+          </a:fillRef>
+          <a:effectRef idx="2">
+            <a:schemeClr val="accent1"/>
+          </a:effectRef>
+          <a:fontRef idx="minor">
+            <a:schemeClr val="lt1"/>
+          </a:fontRef>
+        </p:style>
+        <p:txBody>
+          <a:bodyPr rtlCol="0" anchor="ctr"/>
+          <a:lstStyle/>
+          <a:p>
+            <a:pPr algn="ctr"/>
+          </a:p>
+        </p:txBody>
+      </p:sp>
+      <p:sp>
+        <p:nvSpPr>
+          <p:cNvPr id="12" name="Rounded Rectangle 11"/>
+          <p:cNvSpPr/>
+          <p:nvPr/>
+        </p:nvSpPr>
+        <p:spPr>
+          <a:xfrm>
+            <a:off x="731519" y="1508760"/>
+            <a:ext cx="10728655" cy="32004"/>
+          </a:xfrm>
+          <a:prstGeom prst="roundRect">
+            <a:avLst>
+              <a:gd name="adj" fmla="val 50000"/>
+            </a:avLst>
+          </a:prstGeom>
+          <a:solidFill>
+            <a:srgbClr val="FFFFFF">
+              <a:alpha val="85000"/>
+            </a:srgbClr>
+          </a:solidFill>
+          <a:ln>
+            <a:noFill/>
+          </a:ln>
+          <a:effectLst/>
+        </p:spPr>
+        <p:style>
+          <a:lnRef idx="1">
+            <a:schemeClr val="accent1"/>
+          </a:lnRef>
+          <a:fillRef idx="3">
+            <a:schemeClr val="accent1"/>
+          </a:fillRef>
+          <a:effectRef idx="2">
+            <a:schemeClr val="accent1"/>
+          </a:effectRef>
+          <a:fontRef idx="minor">
+            <a:schemeClr val="lt1"/>
+          </a:fontRef>
+        </p:style>
+        <p:txBody>
+          <a:bodyPr rtlCol="0" anchor="ctr"/>
+          <a:lstStyle/>
+          <a:p>
+            <a:pPr algn="ctr"/>
+          </a:p>
+        </p:txBody>
+      </p:sp>
+      <p:sp>
+        <p:nvSpPr>
+          <p:cNvPr id="13" name="Rounded Rectangle 12"/>
+          <p:cNvSpPr/>
+          <p:nvPr/>
+        </p:nvSpPr>
+        <p:spPr>
+          <a:xfrm>
+            <a:off x="548640" y="1591056"/>
+            <a:ext cx="64008" cy="873252"/>
+          </a:xfrm>
+          <a:prstGeom prst="roundRect">
+            <a:avLst>
+              <a:gd name="adj" fmla="val 50000"/>
+            </a:avLst>
+          </a:prstGeom>
+          <a:solidFill>
+            <a:srgbClr val="8D6A2A"/>
+          </a:solidFill>
+          <a:ln>
+            <a:noFill/>
+          </a:ln>
+          <a:effectLst>
+            <a:outerShdw blurRad="203200" dist="50800" dir="5400000" algn="t" rotWithShape="0">
+              <a:srgbClr val="1A2340">
+                <a:alpha val="20000"/>
+              </a:srgbClr>
+            </a:outerShdw>
+          </a:effectLst>
+          <a:scene3d>
+            <a:camera prst="orthographicFront"/>
+            <a:lightRig rig="threePt" dir="t"/>
+          </a:scene3d>
+          <a:sp3d>
+            <a:bevelT w="44450" h="25400" prst="softRound"/>
+          </a:sp3d>
+        </p:spPr>
+        <p:style>
+          <a:lnRef idx="1">
+            <a:schemeClr val="accent1"/>
+          </a:lnRef>
+          <a:fillRef idx="3">
+            <a:schemeClr val="accent1"/>
+          </a:fillRef>
+          <a:effectRef idx="2">
+            <a:schemeClr val="accent1"/>
+          </a:effectRef>
+          <a:fontRef idx="minor">
+            <a:schemeClr val="lt1"/>
+          </a:fontRef>
+        </p:style>
+        <p:txBody>
+          <a:bodyPr rtlCol="0" anchor="ctr"/>
+          <a:lstStyle/>
+          <a:p>
+            <a:pPr algn="ctr"/>
+          </a:p>
+        </p:txBody>
+      </p:sp>
+      <p:sp>
+        <p:nvSpPr>
+          <p:cNvPr id="14" name="TextBox 13"/>
           <p:cNvSpPr txBox="1"/>
           <p:nvPr/>
         </p:nvSpPr>
         <p:spPr>
           <a:xfrm>
-            <a:off x="548640" y="1554480"/>
-            <a:ext cx="11094415" cy="1092708"/>
+            <a:off x="777240" y="1554480"/>
+            <a:ext cx="10865815" cy="1092708"/>
           </a:xfrm>
           <a:prstGeom prst="rect">
             <a:avLst/>
@@ -5919,7 +6082,7 @@
       </p:sp>
       <p:graphicFrame>
         <p:nvGraphicFramePr>
-          <p:cNvPr id="12" name="Table 11"/>
+          <p:cNvPr id="15" name="Table 14"/>
           <p:cNvGraphicFramePr>
             <a:graphicFrameLocks noGrp="1"/>
           </p:cNvGraphicFramePr>
@@ -6803,14 +6966,177 @@
       </p:pic>
       <p:sp>
         <p:nvSpPr>
-          <p:cNvPr id="11" name="TextBox 10"/>
+          <p:cNvPr id="11" name="Rounded Rectangle 10"/>
+          <p:cNvSpPr/>
+          <p:nvPr/>
+        </p:nvSpPr>
+        <p:spPr>
+          <a:xfrm>
+            <a:off x="411479" y="1444752"/>
+            <a:ext cx="11368735" cy="4800600"/>
+          </a:xfrm>
+          <a:prstGeom prst="roundRect">
+            <a:avLst>
+              <a:gd name="adj" fmla="val 4000"/>
+            </a:avLst>
+          </a:prstGeom>
+          <a:solidFill>
+            <a:srgbClr val="FFFFFF">
+              <a:alpha val="84000"/>
+            </a:srgbClr>
+          </a:solidFill>
+          <a:ln w="19050">
+            <a:solidFill>
+              <a:srgbClr val="FFFFFF"/>
+            </a:solidFill>
+          </a:ln>
+          <a:effectLst>
+            <a:outerShdw blurRad="203200" dist="50800" dir="5400000" algn="t" rotWithShape="0">
+              <a:srgbClr val="1A2340">
+                <a:alpha val="20000"/>
+              </a:srgbClr>
+            </a:outerShdw>
+          </a:effectLst>
+        </p:spPr>
+        <p:style>
+          <a:lnRef idx="1">
+            <a:schemeClr val="accent1"/>
+          </a:lnRef>
+          <a:fillRef idx="3">
+            <a:schemeClr val="accent1"/>
+          </a:fillRef>
+          <a:effectRef idx="2">
+            <a:schemeClr val="accent1"/>
+          </a:effectRef>
+          <a:fontRef idx="minor">
+            <a:schemeClr val="lt1"/>
+          </a:fontRef>
+        </p:style>
+        <p:txBody>
+          <a:bodyPr rtlCol="0" anchor="ctr"/>
+          <a:lstStyle/>
+          <a:p>
+            <a:pPr algn="ctr"/>
+          </a:p>
+        </p:txBody>
+      </p:sp>
+      <p:sp>
+        <p:nvSpPr>
+          <p:cNvPr id="12" name="Rounded Rectangle 11"/>
+          <p:cNvSpPr/>
+          <p:nvPr/>
+        </p:nvSpPr>
+        <p:spPr>
+          <a:xfrm>
+            <a:off x="731519" y="1508760"/>
+            <a:ext cx="10728655" cy="32004"/>
+          </a:xfrm>
+          <a:prstGeom prst="roundRect">
+            <a:avLst>
+              <a:gd name="adj" fmla="val 50000"/>
+            </a:avLst>
+          </a:prstGeom>
+          <a:solidFill>
+            <a:srgbClr val="FFFFFF">
+              <a:alpha val="85000"/>
+            </a:srgbClr>
+          </a:solidFill>
+          <a:ln>
+            <a:noFill/>
+          </a:ln>
+          <a:effectLst/>
+        </p:spPr>
+        <p:style>
+          <a:lnRef idx="1">
+            <a:schemeClr val="accent1"/>
+          </a:lnRef>
+          <a:fillRef idx="3">
+            <a:schemeClr val="accent1"/>
+          </a:fillRef>
+          <a:effectRef idx="2">
+            <a:schemeClr val="accent1"/>
+          </a:effectRef>
+          <a:fontRef idx="minor">
+            <a:schemeClr val="lt1"/>
+          </a:fontRef>
+        </p:style>
+        <p:txBody>
+          <a:bodyPr rtlCol="0" anchor="ctr"/>
+          <a:lstStyle/>
+          <a:p>
+            <a:pPr algn="ctr"/>
+          </a:p>
+        </p:txBody>
+      </p:sp>
+      <p:sp>
+        <p:nvSpPr>
+          <p:cNvPr id="13" name="Rounded Rectangle 12"/>
+          <p:cNvSpPr/>
+          <p:nvPr/>
+        </p:nvSpPr>
+        <p:spPr>
+          <a:xfrm>
+            <a:off x="548640" y="1591056"/>
+            <a:ext cx="64008" cy="594360"/>
+          </a:xfrm>
+          <a:prstGeom prst="roundRect">
+            <a:avLst>
+              <a:gd name="adj" fmla="val 50000"/>
+            </a:avLst>
+          </a:prstGeom>
+          <a:solidFill>
+            <a:srgbClr val="8D6A2A"/>
+          </a:solidFill>
+          <a:ln>
+            <a:noFill/>
+          </a:ln>
+          <a:effectLst>
+            <a:outerShdw blurRad="203200" dist="50800" dir="5400000" algn="t" rotWithShape="0">
+              <a:srgbClr val="1A2340">
+                <a:alpha val="20000"/>
+              </a:srgbClr>
+            </a:outerShdw>
+          </a:effectLst>
+          <a:scene3d>
+            <a:camera prst="orthographicFront"/>
+            <a:lightRig rig="threePt" dir="t"/>
+          </a:scene3d>
+          <a:sp3d>
+            <a:bevelT w="44450" h="25400" prst="softRound"/>
+          </a:sp3d>
+        </p:spPr>
+        <p:style>
+          <a:lnRef idx="1">
+            <a:schemeClr val="accent1"/>
+          </a:lnRef>
+          <a:fillRef idx="3">
+            <a:schemeClr val="accent1"/>
+          </a:fillRef>
+          <a:effectRef idx="2">
+            <a:schemeClr val="accent1"/>
+          </a:effectRef>
+          <a:fontRef idx="minor">
+            <a:schemeClr val="lt1"/>
+          </a:fontRef>
+        </p:style>
+        <p:txBody>
+          <a:bodyPr rtlCol="0" anchor="ctr"/>
+          <a:lstStyle/>
+          <a:p>
+            <a:pPr algn="ctr"/>
+          </a:p>
+        </p:txBody>
+      </p:sp>
+      <p:sp>
+        <p:nvSpPr>
+          <p:cNvPr id="14" name="TextBox 13"/>
           <p:cNvSpPr txBox="1"/>
           <p:nvPr/>
         </p:nvSpPr>
         <p:spPr>
           <a:xfrm>
-            <a:off x="548640" y="1554480"/>
-            <a:ext cx="11094415" cy="795528"/>
+            <a:off x="777240" y="1554480"/>
+            <a:ext cx="10865815" cy="795528"/>
           </a:xfrm>
           <a:prstGeom prst="rect">
             <a:avLst/>
@@ -6842,7 +7168,7 @@
       </p:sp>
       <p:sp>
         <p:nvSpPr>
-          <p:cNvPr id="12" name="Oval 11"/>
+          <p:cNvPr id="15" name="Oval 14"/>
           <p:cNvSpPr/>
           <p:nvPr/>
         </p:nvSpPr>
@@ -6895,7 +7221,7 @@
       </p:sp>
       <p:sp>
         <p:nvSpPr>
-          <p:cNvPr id="13" name="TextBox 12"/>
+          <p:cNvPr id="16" name="TextBox 15"/>
           <p:cNvSpPr txBox="1"/>
           <p:nvPr/>
         </p:nvSpPr>
@@ -6929,7 +7255,7 @@
       </p:sp>
       <p:sp>
         <p:nvSpPr>
-          <p:cNvPr id="14" name="Oval 13"/>
+          <p:cNvPr id="17" name="Oval 16"/>
           <p:cNvSpPr/>
           <p:nvPr/>
         </p:nvSpPr>
@@ -6982,7 +7308,7 @@
       </p:sp>
       <p:sp>
         <p:nvSpPr>
-          <p:cNvPr id="15" name="TextBox 14"/>
+          <p:cNvPr id="18" name="TextBox 17"/>
           <p:cNvSpPr txBox="1"/>
           <p:nvPr/>
         </p:nvSpPr>
@@ -7016,7 +7342,7 @@
       </p:sp>
       <p:sp>
         <p:nvSpPr>
-          <p:cNvPr id="16" name="Oval 15"/>
+          <p:cNvPr id="19" name="Oval 18"/>
           <p:cNvSpPr/>
           <p:nvPr/>
         </p:nvSpPr>
@@ -7069,7 +7395,7 @@
       </p:sp>
       <p:sp>
         <p:nvSpPr>
-          <p:cNvPr id="17" name="TextBox 16"/>
+          <p:cNvPr id="20" name="TextBox 19"/>
           <p:cNvSpPr txBox="1"/>
           <p:nvPr/>
         </p:nvSpPr>
@@ -7490,6 +7816,110 @@
         </p:nvSpPr>
         <p:spPr>
           <a:xfrm>
+            <a:off x="411479" y="1444752"/>
+            <a:ext cx="11368735" cy="4800600"/>
+          </a:xfrm>
+          <a:prstGeom prst="roundRect">
+            <a:avLst>
+              <a:gd name="adj" fmla="val 4000"/>
+            </a:avLst>
+          </a:prstGeom>
+          <a:solidFill>
+            <a:srgbClr val="FFFFFF">
+              <a:alpha val="84000"/>
+            </a:srgbClr>
+          </a:solidFill>
+          <a:ln w="19050">
+            <a:solidFill>
+              <a:srgbClr val="FFFFFF"/>
+            </a:solidFill>
+          </a:ln>
+          <a:effectLst>
+            <a:outerShdw blurRad="203200" dist="50800" dir="5400000" algn="t" rotWithShape="0">
+              <a:srgbClr val="1A2340">
+                <a:alpha val="20000"/>
+              </a:srgbClr>
+            </a:outerShdw>
+          </a:effectLst>
+        </p:spPr>
+        <p:style>
+          <a:lnRef idx="1">
+            <a:schemeClr val="accent1"/>
+          </a:lnRef>
+          <a:fillRef idx="3">
+            <a:schemeClr val="accent1"/>
+          </a:fillRef>
+          <a:effectRef idx="2">
+            <a:schemeClr val="accent1"/>
+          </a:effectRef>
+          <a:fontRef idx="minor">
+            <a:schemeClr val="lt1"/>
+          </a:fontRef>
+        </p:style>
+        <p:txBody>
+          <a:bodyPr rtlCol="0" anchor="ctr"/>
+          <a:lstStyle/>
+          <a:p>
+            <a:pPr algn="ctr"/>
+          </a:p>
+        </p:txBody>
+      </p:sp>
+      <p:sp>
+        <p:nvSpPr>
+          <p:cNvPr id="12" name="Rounded Rectangle 11"/>
+          <p:cNvSpPr/>
+          <p:nvPr/>
+        </p:nvSpPr>
+        <p:spPr>
+          <a:xfrm>
+            <a:off x="731519" y="1508760"/>
+            <a:ext cx="10728655" cy="32004"/>
+          </a:xfrm>
+          <a:prstGeom prst="roundRect">
+            <a:avLst>
+              <a:gd name="adj" fmla="val 50000"/>
+            </a:avLst>
+          </a:prstGeom>
+          <a:solidFill>
+            <a:srgbClr val="FFFFFF">
+              <a:alpha val="85000"/>
+            </a:srgbClr>
+          </a:solidFill>
+          <a:ln>
+            <a:noFill/>
+          </a:ln>
+          <a:effectLst/>
+        </p:spPr>
+        <p:style>
+          <a:lnRef idx="1">
+            <a:schemeClr val="accent1"/>
+          </a:lnRef>
+          <a:fillRef idx="3">
+            <a:schemeClr val="accent1"/>
+          </a:fillRef>
+          <a:effectRef idx="2">
+            <a:schemeClr val="accent1"/>
+          </a:effectRef>
+          <a:fontRef idx="minor">
+            <a:schemeClr val="lt1"/>
+          </a:fontRef>
+        </p:style>
+        <p:txBody>
+          <a:bodyPr rtlCol="0" anchor="ctr"/>
+          <a:lstStyle/>
+          <a:p>
+            <a:pPr algn="ctr"/>
+          </a:p>
+        </p:txBody>
+      </p:sp>
+      <p:sp>
+        <p:nvSpPr>
+          <p:cNvPr id="13" name="Rounded Rectangle 12"/>
+          <p:cNvSpPr/>
+          <p:nvPr/>
+        </p:nvSpPr>
+        <p:spPr>
+          <a:xfrm>
             <a:off x="1645919" y="2103120"/>
             <a:ext cx="8899855" cy="3884168"/>
           </a:xfrm>
@@ -7540,7 +7970,7 @@
       </p:sp>
       <p:sp>
         <p:nvSpPr>
-          <p:cNvPr id="12" name="Rounded Rectangle 11"/>
+          <p:cNvPr id="14" name="Rounded Rectangle 13"/>
           <p:cNvSpPr/>
           <p:nvPr/>
         </p:nvSpPr>
@@ -7588,7 +8018,7 @@
       </p:sp>
       <p:sp>
         <p:nvSpPr>
-          <p:cNvPr id="13" name="Rounded Rectangle 12"/>
+          <p:cNvPr id="15" name="Rounded Rectangle 14"/>
           <p:cNvSpPr/>
           <p:nvPr/>
         </p:nvSpPr>
@@ -7656,7 +8086,7 @@
       </p:sp>
       <p:sp>
         <p:nvSpPr>
-          <p:cNvPr id="14" name="TextBox 13"/>
+          <p:cNvPr id="16" name="TextBox 15"/>
           <p:cNvSpPr txBox="1"/>
           <p:nvPr/>
         </p:nvSpPr>
@@ -8076,14 +8506,177 @@
       </p:pic>
       <p:sp>
         <p:nvSpPr>
-          <p:cNvPr id="11" name="TextBox 10"/>
+          <p:cNvPr id="11" name="Rounded Rectangle 10"/>
+          <p:cNvSpPr/>
+          <p:nvPr/>
+        </p:nvSpPr>
+        <p:spPr>
+          <a:xfrm>
+            <a:off x="411479" y="1444752"/>
+            <a:ext cx="11368735" cy="4800600"/>
+          </a:xfrm>
+          <a:prstGeom prst="roundRect">
+            <a:avLst>
+              <a:gd name="adj" fmla="val 4000"/>
+            </a:avLst>
+          </a:prstGeom>
+          <a:solidFill>
+            <a:srgbClr val="FFFFFF">
+              <a:alpha val="84000"/>
+            </a:srgbClr>
+          </a:solidFill>
+          <a:ln w="19050">
+            <a:solidFill>
+              <a:srgbClr val="FFFFFF"/>
+            </a:solidFill>
+          </a:ln>
+          <a:effectLst>
+            <a:outerShdw blurRad="203200" dist="50800" dir="5400000" algn="t" rotWithShape="0">
+              <a:srgbClr val="1A2340">
+                <a:alpha val="20000"/>
+              </a:srgbClr>
+            </a:outerShdw>
+          </a:effectLst>
+        </p:spPr>
+        <p:style>
+          <a:lnRef idx="1">
+            <a:schemeClr val="accent1"/>
+          </a:lnRef>
+          <a:fillRef idx="3">
+            <a:schemeClr val="accent1"/>
+          </a:fillRef>
+          <a:effectRef idx="2">
+            <a:schemeClr val="accent1"/>
+          </a:effectRef>
+          <a:fontRef idx="minor">
+            <a:schemeClr val="lt1"/>
+          </a:fontRef>
+        </p:style>
+        <p:txBody>
+          <a:bodyPr rtlCol="0" anchor="ctr"/>
+          <a:lstStyle/>
+          <a:p>
+            <a:pPr algn="ctr"/>
+          </a:p>
+        </p:txBody>
+      </p:sp>
+      <p:sp>
+        <p:nvSpPr>
+          <p:cNvPr id="12" name="Rounded Rectangle 11"/>
+          <p:cNvSpPr/>
+          <p:nvPr/>
+        </p:nvSpPr>
+        <p:spPr>
+          <a:xfrm>
+            <a:off x="731519" y="1508760"/>
+            <a:ext cx="10728655" cy="32004"/>
+          </a:xfrm>
+          <a:prstGeom prst="roundRect">
+            <a:avLst>
+              <a:gd name="adj" fmla="val 50000"/>
+            </a:avLst>
+          </a:prstGeom>
+          <a:solidFill>
+            <a:srgbClr val="FFFFFF">
+              <a:alpha val="85000"/>
+            </a:srgbClr>
+          </a:solidFill>
+          <a:ln>
+            <a:noFill/>
+          </a:ln>
+          <a:effectLst/>
+        </p:spPr>
+        <p:style>
+          <a:lnRef idx="1">
+            <a:schemeClr val="accent1"/>
+          </a:lnRef>
+          <a:fillRef idx="3">
+            <a:schemeClr val="accent1"/>
+          </a:fillRef>
+          <a:effectRef idx="2">
+            <a:schemeClr val="accent1"/>
+          </a:effectRef>
+          <a:fontRef idx="minor">
+            <a:schemeClr val="lt1"/>
+          </a:fontRef>
+        </p:style>
+        <p:txBody>
+          <a:bodyPr rtlCol="0" anchor="ctr"/>
+          <a:lstStyle/>
+          <a:p>
+            <a:pPr algn="ctr"/>
+          </a:p>
+        </p:txBody>
+      </p:sp>
+      <p:sp>
+        <p:nvSpPr>
+          <p:cNvPr id="13" name="Rounded Rectangle 12"/>
+          <p:cNvSpPr/>
+          <p:nvPr/>
+        </p:nvSpPr>
+        <p:spPr>
+          <a:xfrm>
+            <a:off x="548640" y="1591056"/>
+            <a:ext cx="64008" cy="594360"/>
+          </a:xfrm>
+          <a:prstGeom prst="roundRect">
+            <a:avLst>
+              <a:gd name="adj" fmla="val 50000"/>
+            </a:avLst>
+          </a:prstGeom>
+          <a:solidFill>
+            <a:srgbClr val="8D6A2A"/>
+          </a:solidFill>
+          <a:ln>
+            <a:noFill/>
+          </a:ln>
+          <a:effectLst>
+            <a:outerShdw blurRad="203200" dist="50800" dir="5400000" algn="t" rotWithShape="0">
+              <a:srgbClr val="1A2340">
+                <a:alpha val="20000"/>
+              </a:srgbClr>
+            </a:outerShdw>
+          </a:effectLst>
+          <a:scene3d>
+            <a:camera prst="orthographicFront"/>
+            <a:lightRig rig="threePt" dir="t"/>
+          </a:scene3d>
+          <a:sp3d>
+            <a:bevelT w="44450" h="25400" prst="softRound"/>
+          </a:sp3d>
+        </p:spPr>
+        <p:style>
+          <a:lnRef idx="1">
+            <a:schemeClr val="accent1"/>
+          </a:lnRef>
+          <a:fillRef idx="3">
+            <a:schemeClr val="accent1"/>
+          </a:fillRef>
+          <a:effectRef idx="2">
+            <a:schemeClr val="accent1"/>
+          </a:effectRef>
+          <a:fontRef idx="minor">
+            <a:schemeClr val="lt1"/>
+          </a:fontRef>
+        </p:style>
+        <p:txBody>
+          <a:bodyPr rtlCol="0" anchor="ctr"/>
+          <a:lstStyle/>
+          <a:p>
+            <a:pPr algn="ctr"/>
+          </a:p>
+        </p:txBody>
+      </p:sp>
+      <p:sp>
+        <p:nvSpPr>
+          <p:cNvPr id="14" name="TextBox 13"/>
           <p:cNvSpPr txBox="1"/>
           <p:nvPr/>
         </p:nvSpPr>
         <p:spPr>
           <a:xfrm>
-            <a:off x="548640" y="1554480"/>
-            <a:ext cx="11094415" cy="795528"/>
+            <a:off x="777240" y="1554480"/>
+            <a:ext cx="10865815" cy="795528"/>
           </a:xfrm>
           <a:prstGeom prst="rect">
             <a:avLst/>
@@ -8151,7 +8744,7 @@
       </p:sp>
       <p:graphicFrame>
         <p:nvGraphicFramePr>
-          <p:cNvPr id="12" name="Table 11"/>
+          <p:cNvPr id="15" name="Table 14"/>
           <p:cNvGraphicFramePr>
             <a:graphicFrameLocks noGrp="1"/>
           </p:cNvGraphicFramePr>
@@ -8795,9 +9388,113 @@
           </a:prstGeom>
         </p:spPr>
       </p:pic>
+      <p:sp>
+        <p:nvSpPr>
+          <p:cNvPr id="11" name="Rounded Rectangle 10"/>
+          <p:cNvSpPr/>
+          <p:nvPr/>
+        </p:nvSpPr>
+        <p:spPr>
+          <a:xfrm>
+            <a:off x="411479" y="1444752"/>
+            <a:ext cx="11368735" cy="4800600"/>
+          </a:xfrm>
+          <a:prstGeom prst="roundRect">
+            <a:avLst>
+              <a:gd name="adj" fmla="val 4000"/>
+            </a:avLst>
+          </a:prstGeom>
+          <a:solidFill>
+            <a:srgbClr val="FFFFFF">
+              <a:alpha val="84000"/>
+            </a:srgbClr>
+          </a:solidFill>
+          <a:ln w="19050">
+            <a:solidFill>
+              <a:srgbClr val="FFFFFF"/>
+            </a:solidFill>
+          </a:ln>
+          <a:effectLst>
+            <a:outerShdw blurRad="203200" dist="50800" dir="5400000" algn="t" rotWithShape="0">
+              <a:srgbClr val="1A2340">
+                <a:alpha val="20000"/>
+              </a:srgbClr>
+            </a:outerShdw>
+          </a:effectLst>
+        </p:spPr>
+        <p:style>
+          <a:lnRef idx="1">
+            <a:schemeClr val="accent1"/>
+          </a:lnRef>
+          <a:fillRef idx="3">
+            <a:schemeClr val="accent1"/>
+          </a:fillRef>
+          <a:effectRef idx="2">
+            <a:schemeClr val="accent1"/>
+          </a:effectRef>
+          <a:fontRef idx="minor">
+            <a:schemeClr val="lt1"/>
+          </a:fontRef>
+        </p:style>
+        <p:txBody>
+          <a:bodyPr rtlCol="0" anchor="ctr"/>
+          <a:lstStyle/>
+          <a:p>
+            <a:pPr algn="ctr"/>
+          </a:p>
+        </p:txBody>
+      </p:sp>
+      <p:sp>
+        <p:nvSpPr>
+          <p:cNvPr id="12" name="Rounded Rectangle 11"/>
+          <p:cNvSpPr/>
+          <p:nvPr/>
+        </p:nvSpPr>
+        <p:spPr>
+          <a:xfrm>
+            <a:off x="731519" y="1508760"/>
+            <a:ext cx="10728655" cy="32004"/>
+          </a:xfrm>
+          <a:prstGeom prst="roundRect">
+            <a:avLst>
+              <a:gd name="adj" fmla="val 50000"/>
+            </a:avLst>
+          </a:prstGeom>
+          <a:solidFill>
+            <a:srgbClr val="FFFFFF">
+              <a:alpha val="85000"/>
+            </a:srgbClr>
+          </a:solidFill>
+          <a:ln>
+            <a:noFill/>
+          </a:ln>
+          <a:effectLst/>
+        </p:spPr>
+        <p:style>
+          <a:lnRef idx="1">
+            <a:schemeClr val="accent1"/>
+          </a:lnRef>
+          <a:fillRef idx="3">
+            <a:schemeClr val="accent1"/>
+          </a:fillRef>
+          <a:effectRef idx="2">
+            <a:schemeClr val="accent1"/>
+          </a:effectRef>
+          <a:fontRef idx="minor">
+            <a:schemeClr val="lt1"/>
+          </a:fontRef>
+        </p:style>
+        <p:txBody>
+          <a:bodyPr rtlCol="0" anchor="ctr"/>
+          <a:lstStyle/>
+          <a:p>
+            <a:pPr algn="ctr"/>
+          </a:p>
+        </p:txBody>
+      </p:sp>
       <p:graphicFrame>
         <p:nvGraphicFramePr>
-          <p:cNvPr id="11" name="Table 10"/>
+          <p:cNvPr id="13" name="Table 12"/>
           <p:cNvGraphicFramePr>
             <a:graphicFrameLocks noGrp="1"/>
           </p:cNvGraphicFramePr>
@@ -9475,9 +10172,113 @@
           </a:prstGeom>
         </p:spPr>
       </p:pic>
+      <p:sp>
+        <p:nvSpPr>
+          <p:cNvPr id="11" name="Rounded Rectangle 10"/>
+          <p:cNvSpPr/>
+          <p:nvPr/>
+        </p:nvSpPr>
+        <p:spPr>
+          <a:xfrm>
+            <a:off x="411479" y="1444752"/>
+            <a:ext cx="11368735" cy="4800600"/>
+          </a:xfrm>
+          <a:prstGeom prst="roundRect">
+            <a:avLst>
+              <a:gd name="adj" fmla="val 4000"/>
+            </a:avLst>
+          </a:prstGeom>
+          <a:solidFill>
+            <a:srgbClr val="FFFFFF">
+              <a:alpha val="84000"/>
+            </a:srgbClr>
+          </a:solidFill>
+          <a:ln w="19050">
+            <a:solidFill>
+              <a:srgbClr val="FFFFFF"/>
+            </a:solidFill>
+          </a:ln>
+          <a:effectLst>
+            <a:outerShdw blurRad="203200" dist="50800" dir="5400000" algn="t" rotWithShape="0">
+              <a:srgbClr val="1A2340">
+                <a:alpha val="20000"/>
+              </a:srgbClr>
+            </a:outerShdw>
+          </a:effectLst>
+        </p:spPr>
+        <p:style>
+          <a:lnRef idx="1">
+            <a:schemeClr val="accent1"/>
+          </a:lnRef>
+          <a:fillRef idx="3">
+            <a:schemeClr val="accent1"/>
+          </a:fillRef>
+          <a:effectRef idx="2">
+            <a:schemeClr val="accent1"/>
+          </a:effectRef>
+          <a:fontRef idx="minor">
+            <a:schemeClr val="lt1"/>
+          </a:fontRef>
+        </p:style>
+        <p:txBody>
+          <a:bodyPr rtlCol="0" anchor="ctr"/>
+          <a:lstStyle/>
+          <a:p>
+            <a:pPr algn="ctr"/>
+          </a:p>
+        </p:txBody>
+      </p:sp>
+      <p:sp>
+        <p:nvSpPr>
+          <p:cNvPr id="12" name="Rounded Rectangle 11"/>
+          <p:cNvSpPr/>
+          <p:nvPr/>
+        </p:nvSpPr>
+        <p:spPr>
+          <a:xfrm>
+            <a:off x="731519" y="1508760"/>
+            <a:ext cx="10728655" cy="32004"/>
+          </a:xfrm>
+          <a:prstGeom prst="roundRect">
+            <a:avLst>
+              <a:gd name="adj" fmla="val 50000"/>
+            </a:avLst>
+          </a:prstGeom>
+          <a:solidFill>
+            <a:srgbClr val="FFFFFF">
+              <a:alpha val="85000"/>
+            </a:srgbClr>
+          </a:solidFill>
+          <a:ln>
+            <a:noFill/>
+          </a:ln>
+          <a:effectLst/>
+        </p:spPr>
+        <p:style>
+          <a:lnRef idx="1">
+            <a:schemeClr val="accent1"/>
+          </a:lnRef>
+          <a:fillRef idx="3">
+            <a:schemeClr val="accent1"/>
+          </a:fillRef>
+          <a:effectRef idx="2">
+            <a:schemeClr val="accent1"/>
+          </a:effectRef>
+          <a:fontRef idx="minor">
+            <a:schemeClr val="lt1"/>
+          </a:fontRef>
+        </p:style>
+        <p:txBody>
+          <a:bodyPr rtlCol="0" anchor="ctr"/>
+          <a:lstStyle/>
+          <a:p>
+            <a:pPr algn="ctr"/>
+          </a:p>
+        </p:txBody>
+      </p:sp>
       <p:graphicFrame>
         <p:nvGraphicFramePr>
-          <p:cNvPr id="11" name="Table 10"/>
+          <p:cNvPr id="13" name="Table 12"/>
           <p:cNvGraphicFramePr>
             <a:graphicFrameLocks noGrp="1"/>
           </p:cNvGraphicFramePr>
@@ -10250,9 +11051,113 @@
           </a:prstGeom>
         </p:spPr>
       </p:pic>
+      <p:sp>
+        <p:nvSpPr>
+          <p:cNvPr id="11" name="Rounded Rectangle 10"/>
+          <p:cNvSpPr/>
+          <p:nvPr/>
+        </p:nvSpPr>
+        <p:spPr>
+          <a:xfrm>
+            <a:off x="411479" y="1444752"/>
+            <a:ext cx="11368735" cy="4800600"/>
+          </a:xfrm>
+          <a:prstGeom prst="roundRect">
+            <a:avLst>
+              <a:gd name="adj" fmla="val 4000"/>
+            </a:avLst>
+          </a:prstGeom>
+          <a:solidFill>
+            <a:srgbClr val="FFFFFF">
+              <a:alpha val="84000"/>
+            </a:srgbClr>
+          </a:solidFill>
+          <a:ln w="19050">
+            <a:solidFill>
+              <a:srgbClr val="FFFFFF"/>
+            </a:solidFill>
+          </a:ln>
+          <a:effectLst>
+            <a:outerShdw blurRad="203200" dist="50800" dir="5400000" algn="t" rotWithShape="0">
+              <a:srgbClr val="1A2340">
+                <a:alpha val="20000"/>
+              </a:srgbClr>
+            </a:outerShdw>
+          </a:effectLst>
+        </p:spPr>
+        <p:style>
+          <a:lnRef idx="1">
+            <a:schemeClr val="accent1"/>
+          </a:lnRef>
+          <a:fillRef idx="3">
+            <a:schemeClr val="accent1"/>
+          </a:fillRef>
+          <a:effectRef idx="2">
+            <a:schemeClr val="accent1"/>
+          </a:effectRef>
+          <a:fontRef idx="minor">
+            <a:schemeClr val="lt1"/>
+          </a:fontRef>
+        </p:style>
+        <p:txBody>
+          <a:bodyPr rtlCol="0" anchor="ctr"/>
+          <a:lstStyle/>
+          <a:p>
+            <a:pPr algn="ctr"/>
+          </a:p>
+        </p:txBody>
+      </p:sp>
+      <p:sp>
+        <p:nvSpPr>
+          <p:cNvPr id="12" name="Rounded Rectangle 11"/>
+          <p:cNvSpPr/>
+          <p:nvPr/>
+        </p:nvSpPr>
+        <p:spPr>
+          <a:xfrm>
+            <a:off x="731519" y="1508760"/>
+            <a:ext cx="10728655" cy="32004"/>
+          </a:xfrm>
+          <a:prstGeom prst="roundRect">
+            <a:avLst>
+              <a:gd name="adj" fmla="val 50000"/>
+            </a:avLst>
+          </a:prstGeom>
+          <a:solidFill>
+            <a:srgbClr val="FFFFFF">
+              <a:alpha val="85000"/>
+            </a:srgbClr>
+          </a:solidFill>
+          <a:ln>
+            <a:noFill/>
+          </a:ln>
+          <a:effectLst/>
+        </p:spPr>
+        <p:style>
+          <a:lnRef idx="1">
+            <a:schemeClr val="accent1"/>
+          </a:lnRef>
+          <a:fillRef idx="3">
+            <a:schemeClr val="accent1"/>
+          </a:fillRef>
+          <a:effectRef idx="2">
+            <a:schemeClr val="accent1"/>
+          </a:effectRef>
+          <a:fontRef idx="minor">
+            <a:schemeClr val="lt1"/>
+          </a:fontRef>
+        </p:style>
+        <p:txBody>
+          <a:bodyPr rtlCol="0" anchor="ctr"/>
+          <a:lstStyle/>
+          <a:p>
+            <a:pPr algn="ctr"/>
+          </a:p>
+        </p:txBody>
+      </p:sp>
       <p:graphicFrame>
         <p:nvGraphicFramePr>
-          <p:cNvPr id="11" name="Table 10"/>
+          <p:cNvPr id="13" name="Table 12"/>
           <p:cNvGraphicFramePr>
             <a:graphicFrameLocks noGrp="1"/>
           </p:cNvGraphicFramePr>
@@ -10864,7 +11769,111 @@
       </p:pic>
       <p:sp>
         <p:nvSpPr>
-          <p:cNvPr id="11" name="Oval 10"/>
+          <p:cNvPr id="11" name="Rounded Rectangle 10"/>
+          <p:cNvSpPr/>
+          <p:nvPr/>
+        </p:nvSpPr>
+        <p:spPr>
+          <a:xfrm>
+            <a:off x="411479" y="1444752"/>
+            <a:ext cx="11368735" cy="4800600"/>
+          </a:xfrm>
+          <a:prstGeom prst="roundRect">
+            <a:avLst>
+              <a:gd name="adj" fmla="val 4000"/>
+            </a:avLst>
+          </a:prstGeom>
+          <a:solidFill>
+            <a:srgbClr val="FFFFFF">
+              <a:alpha val="84000"/>
+            </a:srgbClr>
+          </a:solidFill>
+          <a:ln w="19050">
+            <a:solidFill>
+              <a:srgbClr val="FFFFFF"/>
+            </a:solidFill>
+          </a:ln>
+          <a:effectLst>
+            <a:outerShdw blurRad="203200" dist="50800" dir="5400000" algn="t" rotWithShape="0">
+              <a:srgbClr val="1A2340">
+                <a:alpha val="20000"/>
+              </a:srgbClr>
+            </a:outerShdw>
+          </a:effectLst>
+        </p:spPr>
+        <p:style>
+          <a:lnRef idx="1">
+            <a:schemeClr val="accent1"/>
+          </a:lnRef>
+          <a:fillRef idx="3">
+            <a:schemeClr val="accent1"/>
+          </a:fillRef>
+          <a:effectRef idx="2">
+            <a:schemeClr val="accent1"/>
+          </a:effectRef>
+          <a:fontRef idx="minor">
+            <a:schemeClr val="lt1"/>
+          </a:fontRef>
+        </p:style>
+        <p:txBody>
+          <a:bodyPr rtlCol="0" anchor="ctr"/>
+          <a:lstStyle/>
+          <a:p>
+            <a:pPr algn="ctr"/>
+          </a:p>
+        </p:txBody>
+      </p:sp>
+      <p:sp>
+        <p:nvSpPr>
+          <p:cNvPr id="12" name="Rounded Rectangle 11"/>
+          <p:cNvSpPr/>
+          <p:nvPr/>
+        </p:nvSpPr>
+        <p:spPr>
+          <a:xfrm>
+            <a:off x="731519" y="1508760"/>
+            <a:ext cx="10728655" cy="32004"/>
+          </a:xfrm>
+          <a:prstGeom prst="roundRect">
+            <a:avLst>
+              <a:gd name="adj" fmla="val 50000"/>
+            </a:avLst>
+          </a:prstGeom>
+          <a:solidFill>
+            <a:srgbClr val="FFFFFF">
+              <a:alpha val="85000"/>
+            </a:srgbClr>
+          </a:solidFill>
+          <a:ln>
+            <a:noFill/>
+          </a:ln>
+          <a:effectLst/>
+        </p:spPr>
+        <p:style>
+          <a:lnRef idx="1">
+            <a:schemeClr val="accent1"/>
+          </a:lnRef>
+          <a:fillRef idx="3">
+            <a:schemeClr val="accent1"/>
+          </a:fillRef>
+          <a:effectRef idx="2">
+            <a:schemeClr val="accent1"/>
+          </a:effectRef>
+          <a:fontRef idx="minor">
+            <a:schemeClr val="lt1"/>
+          </a:fontRef>
+        </p:style>
+        <p:txBody>
+          <a:bodyPr rtlCol="0" anchor="ctr"/>
+          <a:lstStyle/>
+          <a:p>
+            <a:pPr algn="ctr"/>
+          </a:p>
+        </p:txBody>
+      </p:sp>
+      <p:sp>
+        <p:nvSpPr>
+          <p:cNvPr id="13" name="Oval 12"/>
           <p:cNvSpPr/>
           <p:nvPr/>
         </p:nvSpPr>
@@ -10917,7 +11926,7 @@
       </p:sp>
       <p:sp>
         <p:nvSpPr>
-          <p:cNvPr id="12" name="TextBox 11"/>
+          <p:cNvPr id="14" name="TextBox 13"/>
           <p:cNvSpPr txBox="1"/>
           <p:nvPr/>
         </p:nvSpPr>
@@ -10951,7 +11960,7 @@
       </p:sp>
       <p:sp>
         <p:nvSpPr>
-          <p:cNvPr id="13" name="Oval 12"/>
+          <p:cNvPr id="15" name="Oval 14"/>
           <p:cNvSpPr/>
           <p:nvPr/>
         </p:nvSpPr>
@@ -11004,7 +12013,7 @@
       </p:sp>
       <p:sp>
         <p:nvSpPr>
-          <p:cNvPr id="14" name="TextBox 13"/>
+          <p:cNvPr id="16" name="TextBox 15"/>
           <p:cNvSpPr txBox="1"/>
           <p:nvPr/>
         </p:nvSpPr>
@@ -11038,7 +12047,7 @@
       </p:sp>
       <p:sp>
         <p:nvSpPr>
-          <p:cNvPr id="15" name="Oval 14"/>
+          <p:cNvPr id="17" name="Oval 16"/>
           <p:cNvSpPr/>
           <p:nvPr/>
         </p:nvSpPr>
@@ -11091,7 +12100,7 @@
       </p:sp>
       <p:sp>
         <p:nvSpPr>
-          <p:cNvPr id="16" name="TextBox 15"/>
+          <p:cNvPr id="18" name="TextBox 17"/>
           <p:cNvSpPr txBox="1"/>
           <p:nvPr/>
         </p:nvSpPr>
@@ -11506,7 +12515,111 @@
       </p:pic>
       <p:sp>
         <p:nvSpPr>
-          <p:cNvPr id="11" name="TextBox 10"/>
+          <p:cNvPr id="11" name="Rounded Rectangle 10"/>
+          <p:cNvSpPr/>
+          <p:nvPr/>
+        </p:nvSpPr>
+        <p:spPr>
+          <a:xfrm>
+            <a:off x="411479" y="1444752"/>
+            <a:ext cx="11368735" cy="4800600"/>
+          </a:xfrm>
+          <a:prstGeom prst="roundRect">
+            <a:avLst>
+              <a:gd name="adj" fmla="val 4000"/>
+            </a:avLst>
+          </a:prstGeom>
+          <a:solidFill>
+            <a:srgbClr val="FFFFFF">
+              <a:alpha val="84000"/>
+            </a:srgbClr>
+          </a:solidFill>
+          <a:ln w="19050">
+            <a:solidFill>
+              <a:srgbClr val="FFFFFF"/>
+            </a:solidFill>
+          </a:ln>
+          <a:effectLst>
+            <a:outerShdw blurRad="203200" dist="50800" dir="5400000" algn="t" rotWithShape="0">
+              <a:srgbClr val="1A2340">
+                <a:alpha val="20000"/>
+              </a:srgbClr>
+            </a:outerShdw>
+          </a:effectLst>
+        </p:spPr>
+        <p:style>
+          <a:lnRef idx="1">
+            <a:schemeClr val="accent1"/>
+          </a:lnRef>
+          <a:fillRef idx="3">
+            <a:schemeClr val="accent1"/>
+          </a:fillRef>
+          <a:effectRef idx="2">
+            <a:schemeClr val="accent1"/>
+          </a:effectRef>
+          <a:fontRef idx="minor">
+            <a:schemeClr val="lt1"/>
+          </a:fontRef>
+        </p:style>
+        <p:txBody>
+          <a:bodyPr rtlCol="0" anchor="ctr"/>
+          <a:lstStyle/>
+          <a:p>
+            <a:pPr algn="ctr"/>
+          </a:p>
+        </p:txBody>
+      </p:sp>
+      <p:sp>
+        <p:nvSpPr>
+          <p:cNvPr id="12" name="Rounded Rectangle 11"/>
+          <p:cNvSpPr/>
+          <p:nvPr/>
+        </p:nvSpPr>
+        <p:spPr>
+          <a:xfrm>
+            <a:off x="731519" y="1508760"/>
+            <a:ext cx="10728655" cy="32004"/>
+          </a:xfrm>
+          <a:prstGeom prst="roundRect">
+            <a:avLst>
+              <a:gd name="adj" fmla="val 50000"/>
+            </a:avLst>
+          </a:prstGeom>
+          <a:solidFill>
+            <a:srgbClr val="FFFFFF">
+              <a:alpha val="85000"/>
+            </a:srgbClr>
+          </a:solidFill>
+          <a:ln>
+            <a:noFill/>
+          </a:ln>
+          <a:effectLst/>
+        </p:spPr>
+        <p:style>
+          <a:lnRef idx="1">
+            <a:schemeClr val="accent1"/>
+          </a:lnRef>
+          <a:fillRef idx="3">
+            <a:schemeClr val="accent1"/>
+          </a:fillRef>
+          <a:effectRef idx="2">
+            <a:schemeClr val="accent1"/>
+          </a:effectRef>
+          <a:fontRef idx="minor">
+            <a:schemeClr val="lt1"/>
+          </a:fontRef>
+        </p:style>
+        <p:txBody>
+          <a:bodyPr rtlCol="0" anchor="ctr"/>
+          <a:lstStyle/>
+          <a:p>
+            <a:pPr algn="ctr"/>
+          </a:p>
+        </p:txBody>
+      </p:sp>
+      <p:sp>
+        <p:nvSpPr>
+          <p:cNvPr id="13" name="TextBox 12"/>
           <p:cNvSpPr txBox="1"/>
           <p:nvPr/>
         </p:nvSpPr>
@@ -11540,7 +12653,7 @@
       </p:sp>
       <p:sp>
         <p:nvSpPr>
-          <p:cNvPr id="12" name="Rounded Rectangle 11"/>
+          <p:cNvPr id="14" name="Rounded Rectangle 13"/>
           <p:cNvSpPr/>
           <p:nvPr/>
         </p:nvSpPr>
@@ -11596,7 +12709,7 @@
       </p:sp>
       <p:sp>
         <p:nvSpPr>
-          <p:cNvPr id="13" name="Oval 12"/>
+          <p:cNvPr id="15" name="Oval 14"/>
           <p:cNvSpPr/>
           <p:nvPr/>
         </p:nvSpPr>
@@ -11649,7 +12762,7 @@
       </p:sp>
       <p:sp>
         <p:nvSpPr>
-          <p:cNvPr id="14" name="TextBox 13"/>
+          <p:cNvPr id="16" name="TextBox 15"/>
           <p:cNvSpPr txBox="1"/>
           <p:nvPr/>
         </p:nvSpPr>
@@ -11683,7 +12796,7 @@
       </p:sp>
       <p:sp>
         <p:nvSpPr>
-          <p:cNvPr id="15" name="Rounded Rectangle 14"/>
+          <p:cNvPr id="17" name="Rounded Rectangle 16"/>
           <p:cNvSpPr/>
           <p:nvPr/>
         </p:nvSpPr>
@@ -11739,7 +12852,7 @@
       </p:sp>
       <p:sp>
         <p:nvSpPr>
-          <p:cNvPr id="16" name="Oval 15"/>
+          <p:cNvPr id="18" name="Oval 17"/>
           <p:cNvSpPr/>
           <p:nvPr/>
         </p:nvSpPr>
@@ -11792,7 +12905,7 @@
       </p:sp>
       <p:sp>
         <p:nvSpPr>
-          <p:cNvPr id="17" name="TextBox 16"/>
+          <p:cNvPr id="19" name="TextBox 18"/>
           <p:cNvSpPr txBox="1"/>
           <p:nvPr/>
         </p:nvSpPr>
@@ -11826,7 +12939,7 @@
       </p:sp>
       <p:sp>
         <p:nvSpPr>
-          <p:cNvPr id="18" name="Rounded Rectangle 17"/>
+          <p:cNvPr id="20" name="Rounded Rectangle 19"/>
           <p:cNvSpPr/>
           <p:nvPr/>
         </p:nvSpPr>
@@ -11882,7 +12995,7 @@
       </p:sp>
       <p:sp>
         <p:nvSpPr>
-          <p:cNvPr id="19" name="Oval 18"/>
+          <p:cNvPr id="21" name="Oval 20"/>
           <p:cNvSpPr/>
           <p:nvPr/>
         </p:nvSpPr>
@@ -11935,7 +13048,7 @@
       </p:sp>
       <p:sp>
         <p:nvSpPr>
-          <p:cNvPr id="20" name="TextBox 19"/>
+          <p:cNvPr id="22" name="TextBox 21"/>
           <p:cNvSpPr txBox="1"/>
           <p:nvPr/>
         </p:nvSpPr>
@@ -11969,7 +13082,7 @@
       </p:sp>
       <p:sp>
         <p:nvSpPr>
-          <p:cNvPr id="21" name="Rounded Rectangle 20"/>
+          <p:cNvPr id="23" name="Rounded Rectangle 22"/>
           <p:cNvSpPr/>
           <p:nvPr/>
         </p:nvSpPr>
@@ -12025,7 +13138,7 @@
       </p:sp>
       <p:sp>
         <p:nvSpPr>
-          <p:cNvPr id="22" name="Oval 21"/>
+          <p:cNvPr id="24" name="Oval 23"/>
           <p:cNvSpPr/>
           <p:nvPr/>
         </p:nvSpPr>
@@ -12078,7 +13191,7 @@
       </p:sp>
       <p:sp>
         <p:nvSpPr>
-          <p:cNvPr id="23" name="TextBox 22"/>
+          <p:cNvPr id="25" name="TextBox 24"/>
           <p:cNvSpPr txBox="1"/>
           <p:nvPr/>
         </p:nvSpPr>
@@ -12493,7 +13606,111 @@
       </p:pic>
       <p:sp>
         <p:nvSpPr>
-          <p:cNvPr id="11" name="TextBox 10"/>
+          <p:cNvPr id="11" name="Rounded Rectangle 10"/>
+          <p:cNvSpPr/>
+          <p:nvPr/>
+        </p:nvSpPr>
+        <p:spPr>
+          <a:xfrm>
+            <a:off x="411479" y="1444752"/>
+            <a:ext cx="11368735" cy="4800600"/>
+          </a:xfrm>
+          <a:prstGeom prst="roundRect">
+            <a:avLst>
+              <a:gd name="adj" fmla="val 4000"/>
+            </a:avLst>
+          </a:prstGeom>
+          <a:solidFill>
+            <a:srgbClr val="FFFFFF">
+              <a:alpha val="84000"/>
+            </a:srgbClr>
+          </a:solidFill>
+          <a:ln w="19050">
+            <a:solidFill>
+              <a:srgbClr val="FFFFFF"/>
+            </a:solidFill>
+          </a:ln>
+          <a:effectLst>
+            <a:outerShdw blurRad="203200" dist="50800" dir="5400000" algn="t" rotWithShape="0">
+              <a:srgbClr val="1A2340">
+                <a:alpha val="20000"/>
+              </a:srgbClr>
+            </a:outerShdw>
+          </a:effectLst>
+        </p:spPr>
+        <p:style>
+          <a:lnRef idx="1">
+            <a:schemeClr val="accent1"/>
+          </a:lnRef>
+          <a:fillRef idx="3">
+            <a:schemeClr val="accent1"/>
+          </a:fillRef>
+          <a:effectRef idx="2">
+            <a:schemeClr val="accent1"/>
+          </a:effectRef>
+          <a:fontRef idx="minor">
+            <a:schemeClr val="lt1"/>
+          </a:fontRef>
+        </p:style>
+        <p:txBody>
+          <a:bodyPr rtlCol="0" anchor="ctr"/>
+          <a:lstStyle/>
+          <a:p>
+            <a:pPr algn="ctr"/>
+          </a:p>
+        </p:txBody>
+      </p:sp>
+      <p:sp>
+        <p:nvSpPr>
+          <p:cNvPr id="12" name="Rounded Rectangle 11"/>
+          <p:cNvSpPr/>
+          <p:nvPr/>
+        </p:nvSpPr>
+        <p:spPr>
+          <a:xfrm>
+            <a:off x="731519" y="1508760"/>
+            <a:ext cx="10728655" cy="32004"/>
+          </a:xfrm>
+          <a:prstGeom prst="roundRect">
+            <a:avLst>
+              <a:gd name="adj" fmla="val 50000"/>
+            </a:avLst>
+          </a:prstGeom>
+          <a:solidFill>
+            <a:srgbClr val="FFFFFF">
+              <a:alpha val="85000"/>
+            </a:srgbClr>
+          </a:solidFill>
+          <a:ln>
+            <a:noFill/>
+          </a:ln>
+          <a:effectLst/>
+        </p:spPr>
+        <p:style>
+          <a:lnRef idx="1">
+            <a:schemeClr val="accent1"/>
+          </a:lnRef>
+          <a:fillRef idx="3">
+            <a:schemeClr val="accent1"/>
+          </a:fillRef>
+          <a:effectRef idx="2">
+            <a:schemeClr val="accent1"/>
+          </a:effectRef>
+          <a:fontRef idx="minor">
+            <a:schemeClr val="lt1"/>
+          </a:fontRef>
+        </p:style>
+        <p:txBody>
+          <a:bodyPr rtlCol="0" anchor="ctr"/>
+          <a:lstStyle/>
+          <a:p>
+            <a:pPr algn="ctr"/>
+          </a:p>
+        </p:txBody>
+      </p:sp>
+      <p:sp>
+        <p:nvSpPr>
+          <p:cNvPr id="13" name="TextBox 12"/>
           <p:cNvSpPr txBox="1"/>
           <p:nvPr/>
         </p:nvSpPr>
@@ -12527,7 +13744,7 @@
       </p:sp>
       <p:sp>
         <p:nvSpPr>
-          <p:cNvPr id="12" name="Rounded Rectangle 11"/>
+          <p:cNvPr id="14" name="Rounded Rectangle 13"/>
           <p:cNvSpPr/>
           <p:nvPr/>
         </p:nvSpPr>
@@ -12583,7 +13800,7 @@
       </p:sp>
       <p:sp>
         <p:nvSpPr>
-          <p:cNvPr id="13" name="Oval 12"/>
+          <p:cNvPr id="15" name="Oval 14"/>
           <p:cNvSpPr/>
           <p:nvPr/>
         </p:nvSpPr>
@@ -12636,7 +13853,7 @@
       </p:sp>
       <p:sp>
         <p:nvSpPr>
-          <p:cNvPr id="14" name="TextBox 13"/>
+          <p:cNvPr id="16" name="TextBox 15"/>
           <p:cNvSpPr txBox="1"/>
           <p:nvPr/>
         </p:nvSpPr>
@@ -12670,7 +13887,7 @@
       </p:sp>
       <p:sp>
         <p:nvSpPr>
-          <p:cNvPr id="15" name="Rounded Rectangle 14"/>
+          <p:cNvPr id="17" name="Rounded Rectangle 16"/>
           <p:cNvSpPr/>
           <p:nvPr/>
         </p:nvSpPr>
@@ -12726,7 +13943,7 @@
       </p:sp>
       <p:sp>
         <p:nvSpPr>
-          <p:cNvPr id="16" name="Oval 15"/>
+          <p:cNvPr id="18" name="Oval 17"/>
           <p:cNvSpPr/>
           <p:nvPr/>
         </p:nvSpPr>
@@ -12779,7 +13996,7 @@
       </p:sp>
       <p:sp>
         <p:nvSpPr>
-          <p:cNvPr id="17" name="TextBox 16"/>
+          <p:cNvPr id="19" name="TextBox 18"/>
           <p:cNvSpPr txBox="1"/>
           <p:nvPr/>
         </p:nvSpPr>
@@ -12813,7 +14030,7 @@
       </p:sp>
       <p:sp>
         <p:nvSpPr>
-          <p:cNvPr id="18" name="Rounded Rectangle 17"/>
+          <p:cNvPr id="20" name="Rounded Rectangle 19"/>
           <p:cNvSpPr/>
           <p:nvPr/>
         </p:nvSpPr>
@@ -12872,7 +14089,7 @@
       </p:sp>
       <p:sp>
         <p:nvSpPr>
-          <p:cNvPr id="19" name="Oval 18"/>
+          <p:cNvPr id="21" name="Oval 20"/>
           <p:cNvSpPr/>
           <p:nvPr/>
         </p:nvSpPr>
@@ -12925,7 +14142,7 @@
       </p:sp>
       <p:sp>
         <p:nvSpPr>
-          <p:cNvPr id="20" name="TextBox 19"/>
+          <p:cNvPr id="22" name="TextBox 21"/>
           <p:cNvSpPr txBox="1"/>
           <p:nvPr/>
         </p:nvSpPr>
@@ -12959,7 +14176,7 @@
       </p:sp>
       <p:sp>
         <p:nvSpPr>
-          <p:cNvPr id="21" name="Rounded Rectangle 20"/>
+          <p:cNvPr id="23" name="Rounded Rectangle 22"/>
           <p:cNvSpPr/>
           <p:nvPr/>
         </p:nvSpPr>
@@ -13015,7 +14232,7 @@
       </p:sp>
       <p:sp>
         <p:nvSpPr>
-          <p:cNvPr id="22" name="Oval 21"/>
+          <p:cNvPr id="24" name="Oval 23"/>
           <p:cNvSpPr/>
           <p:nvPr/>
         </p:nvSpPr>
@@ -13068,7 +14285,7 @@
       </p:sp>
       <p:sp>
         <p:nvSpPr>
-          <p:cNvPr id="23" name="TextBox 22"/>
+          <p:cNvPr id="25" name="TextBox 24"/>
           <p:cNvSpPr txBox="1"/>
           <p:nvPr/>
         </p:nvSpPr>
@@ -13102,7 +14319,7 @@
       </p:sp>
       <p:sp>
         <p:nvSpPr>
-          <p:cNvPr id="24" name="TextBox 23"/>
+          <p:cNvPr id="26" name="TextBox 25"/>
           <p:cNvSpPr txBox="1"/>
           <p:nvPr/>
         </p:nvSpPr>
@@ -13526,7 +14743,111 @@
       </p:pic>
       <p:sp>
         <p:nvSpPr>
-          <p:cNvPr id="11" name="Oval 10"/>
+          <p:cNvPr id="11" name="Rounded Rectangle 10"/>
+          <p:cNvSpPr/>
+          <p:nvPr/>
+        </p:nvSpPr>
+        <p:spPr>
+          <a:xfrm>
+            <a:off x="411479" y="1444752"/>
+            <a:ext cx="11368735" cy="4800600"/>
+          </a:xfrm>
+          <a:prstGeom prst="roundRect">
+            <a:avLst>
+              <a:gd name="adj" fmla="val 4000"/>
+            </a:avLst>
+          </a:prstGeom>
+          <a:solidFill>
+            <a:srgbClr val="FFFFFF">
+              <a:alpha val="84000"/>
+            </a:srgbClr>
+          </a:solidFill>
+          <a:ln w="19050">
+            <a:solidFill>
+              <a:srgbClr val="FFFFFF"/>
+            </a:solidFill>
+          </a:ln>
+          <a:effectLst>
+            <a:outerShdw blurRad="203200" dist="50800" dir="5400000" algn="t" rotWithShape="0">
+              <a:srgbClr val="1A2340">
+                <a:alpha val="20000"/>
+              </a:srgbClr>
+            </a:outerShdw>
+          </a:effectLst>
+        </p:spPr>
+        <p:style>
+          <a:lnRef idx="1">
+            <a:schemeClr val="accent1"/>
+          </a:lnRef>
+          <a:fillRef idx="3">
+            <a:schemeClr val="accent1"/>
+          </a:fillRef>
+          <a:effectRef idx="2">
+            <a:schemeClr val="accent1"/>
+          </a:effectRef>
+          <a:fontRef idx="minor">
+            <a:schemeClr val="lt1"/>
+          </a:fontRef>
+        </p:style>
+        <p:txBody>
+          <a:bodyPr rtlCol="0" anchor="ctr"/>
+          <a:lstStyle/>
+          <a:p>
+            <a:pPr algn="ctr"/>
+          </a:p>
+        </p:txBody>
+      </p:sp>
+      <p:sp>
+        <p:nvSpPr>
+          <p:cNvPr id="12" name="Rounded Rectangle 11"/>
+          <p:cNvSpPr/>
+          <p:nvPr/>
+        </p:nvSpPr>
+        <p:spPr>
+          <a:xfrm>
+            <a:off x="731519" y="1508760"/>
+            <a:ext cx="10728655" cy="32004"/>
+          </a:xfrm>
+          <a:prstGeom prst="roundRect">
+            <a:avLst>
+              <a:gd name="adj" fmla="val 50000"/>
+            </a:avLst>
+          </a:prstGeom>
+          <a:solidFill>
+            <a:srgbClr val="FFFFFF">
+              <a:alpha val="85000"/>
+            </a:srgbClr>
+          </a:solidFill>
+          <a:ln>
+            <a:noFill/>
+          </a:ln>
+          <a:effectLst/>
+        </p:spPr>
+        <p:style>
+          <a:lnRef idx="1">
+            <a:schemeClr val="accent1"/>
+          </a:lnRef>
+          <a:fillRef idx="3">
+            <a:schemeClr val="accent1"/>
+          </a:fillRef>
+          <a:effectRef idx="2">
+            <a:schemeClr val="accent1"/>
+          </a:effectRef>
+          <a:fontRef idx="minor">
+            <a:schemeClr val="lt1"/>
+          </a:fontRef>
+        </p:style>
+        <p:txBody>
+          <a:bodyPr rtlCol="0" anchor="ctr"/>
+          <a:lstStyle/>
+          <a:p>
+            <a:pPr algn="ctr"/>
+          </a:p>
+        </p:txBody>
+      </p:sp>
+      <p:sp>
+        <p:nvSpPr>
+          <p:cNvPr id="13" name="Oval 12"/>
           <p:cNvSpPr/>
           <p:nvPr/>
         </p:nvSpPr>
@@ -13579,7 +14900,7 @@
       </p:sp>
       <p:sp>
         <p:nvSpPr>
-          <p:cNvPr id="12" name="TextBox 11"/>
+          <p:cNvPr id="14" name="TextBox 13"/>
           <p:cNvSpPr txBox="1"/>
           <p:nvPr/>
         </p:nvSpPr>
@@ -13613,7 +14934,7 @@
       </p:sp>
       <p:sp>
         <p:nvSpPr>
-          <p:cNvPr id="13" name="Oval 12"/>
+          <p:cNvPr id="15" name="Oval 14"/>
           <p:cNvSpPr/>
           <p:nvPr/>
         </p:nvSpPr>
@@ -13666,7 +14987,7 @@
       </p:sp>
       <p:sp>
         <p:nvSpPr>
-          <p:cNvPr id="14" name="TextBox 13"/>
+          <p:cNvPr id="16" name="TextBox 15"/>
           <p:cNvSpPr txBox="1"/>
           <p:nvPr/>
         </p:nvSpPr>
@@ -13700,7 +15021,7 @@
       </p:sp>
       <p:sp>
         <p:nvSpPr>
-          <p:cNvPr id="15" name="Oval 14"/>
+          <p:cNvPr id="17" name="Oval 16"/>
           <p:cNvSpPr/>
           <p:nvPr/>
         </p:nvSpPr>
@@ -13753,7 +15074,7 @@
       </p:sp>
       <p:sp>
         <p:nvSpPr>
-          <p:cNvPr id="16" name="TextBox 15"/>
+          <p:cNvPr id="18" name="TextBox 17"/>
           <p:cNvSpPr txBox="1"/>
           <p:nvPr/>
         </p:nvSpPr>
@@ -13787,7 +15108,7 @@
       </p:sp>
       <p:sp>
         <p:nvSpPr>
-          <p:cNvPr id="17" name="Oval 16"/>
+          <p:cNvPr id="19" name="Oval 18"/>
           <p:cNvSpPr/>
           <p:nvPr/>
         </p:nvSpPr>
@@ -13840,7 +15161,7 @@
       </p:sp>
       <p:sp>
         <p:nvSpPr>
-          <p:cNvPr id="18" name="TextBox 17"/>
+          <p:cNvPr id="20" name="TextBox 19"/>
           <p:cNvSpPr txBox="1"/>
           <p:nvPr/>
         </p:nvSpPr>
@@ -13874,7 +15195,7 @@
       </p:sp>
       <p:sp>
         <p:nvSpPr>
-          <p:cNvPr id="19" name="Oval 18"/>
+          <p:cNvPr id="21" name="Oval 20"/>
           <p:cNvSpPr/>
           <p:nvPr/>
         </p:nvSpPr>
@@ -13927,7 +15248,7 @@
       </p:sp>
       <p:sp>
         <p:nvSpPr>
-          <p:cNvPr id="20" name="TextBox 19"/>
+          <p:cNvPr id="22" name="TextBox 21"/>
           <p:cNvSpPr txBox="1"/>
           <p:nvPr/>
         </p:nvSpPr>
@@ -13961,7 +15282,7 @@
       </p:sp>
       <p:sp>
         <p:nvSpPr>
-          <p:cNvPr id="21" name="Rounded Rectangle 20"/>
+          <p:cNvPr id="23" name="Rounded Rectangle 22"/>
           <p:cNvSpPr/>
           <p:nvPr/>
         </p:nvSpPr>
@@ -14017,7 +15338,7 @@
       </p:sp>
       <p:sp>
         <p:nvSpPr>
-          <p:cNvPr id="22" name="Rounded Rectangle 21"/>
+          <p:cNvPr id="24" name="Rounded Rectangle 23"/>
           <p:cNvSpPr/>
           <p:nvPr/>
         </p:nvSpPr>
@@ -14065,7 +15386,7 @@
       </p:sp>
       <p:sp>
         <p:nvSpPr>
-          <p:cNvPr id="23" name="TextBox 22"/>
+          <p:cNvPr id="25" name="TextBox 24"/>
           <p:cNvSpPr txBox="1"/>
           <p:nvPr/>
         </p:nvSpPr>
@@ -14523,7 +15844,111 @@
       </p:pic>
       <p:sp>
         <p:nvSpPr>
-          <p:cNvPr id="11" name="TextBox 10"/>
+          <p:cNvPr id="11" name="Rounded Rectangle 10"/>
+          <p:cNvSpPr/>
+          <p:nvPr/>
+        </p:nvSpPr>
+        <p:spPr>
+          <a:xfrm>
+            <a:off x="411479" y="1444752"/>
+            <a:ext cx="11368735" cy="4800600"/>
+          </a:xfrm>
+          <a:prstGeom prst="roundRect">
+            <a:avLst>
+              <a:gd name="adj" fmla="val 4000"/>
+            </a:avLst>
+          </a:prstGeom>
+          <a:solidFill>
+            <a:srgbClr val="FFFFFF">
+              <a:alpha val="84000"/>
+            </a:srgbClr>
+          </a:solidFill>
+          <a:ln w="19050">
+            <a:solidFill>
+              <a:srgbClr val="FFFFFF"/>
+            </a:solidFill>
+          </a:ln>
+          <a:effectLst>
+            <a:outerShdw blurRad="203200" dist="50800" dir="5400000" algn="t" rotWithShape="0">
+              <a:srgbClr val="1A2340">
+                <a:alpha val="20000"/>
+              </a:srgbClr>
+            </a:outerShdw>
+          </a:effectLst>
+        </p:spPr>
+        <p:style>
+          <a:lnRef idx="1">
+            <a:schemeClr val="accent1"/>
+          </a:lnRef>
+          <a:fillRef idx="3">
+            <a:schemeClr val="accent1"/>
+          </a:fillRef>
+          <a:effectRef idx="2">
+            <a:schemeClr val="accent1"/>
+          </a:effectRef>
+          <a:fontRef idx="minor">
+            <a:schemeClr val="lt1"/>
+          </a:fontRef>
+        </p:style>
+        <p:txBody>
+          <a:bodyPr rtlCol="0" anchor="ctr"/>
+          <a:lstStyle/>
+          <a:p>
+            <a:pPr algn="ctr"/>
+          </a:p>
+        </p:txBody>
+      </p:sp>
+      <p:sp>
+        <p:nvSpPr>
+          <p:cNvPr id="12" name="Rounded Rectangle 11"/>
+          <p:cNvSpPr/>
+          <p:nvPr/>
+        </p:nvSpPr>
+        <p:spPr>
+          <a:xfrm>
+            <a:off x="731519" y="1508760"/>
+            <a:ext cx="10728655" cy="32004"/>
+          </a:xfrm>
+          <a:prstGeom prst="roundRect">
+            <a:avLst>
+              <a:gd name="adj" fmla="val 50000"/>
+            </a:avLst>
+          </a:prstGeom>
+          <a:solidFill>
+            <a:srgbClr val="FFFFFF">
+              <a:alpha val="85000"/>
+            </a:srgbClr>
+          </a:solidFill>
+          <a:ln>
+            <a:noFill/>
+          </a:ln>
+          <a:effectLst/>
+        </p:spPr>
+        <p:style>
+          <a:lnRef idx="1">
+            <a:schemeClr val="accent1"/>
+          </a:lnRef>
+          <a:fillRef idx="3">
+            <a:schemeClr val="accent1"/>
+          </a:fillRef>
+          <a:effectRef idx="2">
+            <a:schemeClr val="accent1"/>
+          </a:effectRef>
+          <a:fontRef idx="minor">
+            <a:schemeClr val="lt1"/>
+          </a:fontRef>
+        </p:style>
+        <p:txBody>
+          <a:bodyPr rtlCol="0" anchor="ctr"/>
+          <a:lstStyle/>
+          <a:p>
+            <a:pPr algn="ctr"/>
+          </a:p>
+        </p:txBody>
+      </p:sp>
+      <p:sp>
+        <p:nvSpPr>
+          <p:cNvPr id="13" name="TextBox 12"/>
           <p:cNvSpPr txBox="1"/>
           <p:nvPr/>
         </p:nvSpPr>
@@ -14557,7 +15982,7 @@
       </p:sp>
       <p:sp>
         <p:nvSpPr>
-          <p:cNvPr id="12" name="Rounded Rectangle 11"/>
+          <p:cNvPr id="14" name="Rounded Rectangle 13"/>
           <p:cNvSpPr/>
           <p:nvPr/>
         </p:nvSpPr>
@@ -14613,7 +16038,7 @@
       </p:sp>
       <p:sp>
         <p:nvSpPr>
-          <p:cNvPr id="13" name="Oval 12"/>
+          <p:cNvPr id="15" name="Oval 14"/>
           <p:cNvSpPr/>
           <p:nvPr/>
         </p:nvSpPr>
@@ -14666,7 +16091,7 @@
       </p:sp>
       <p:sp>
         <p:nvSpPr>
-          <p:cNvPr id="14" name="TextBox 13"/>
+          <p:cNvPr id="16" name="TextBox 15"/>
           <p:cNvSpPr txBox="1"/>
           <p:nvPr/>
         </p:nvSpPr>
@@ -14700,7 +16125,7 @@
       </p:sp>
       <p:sp>
         <p:nvSpPr>
-          <p:cNvPr id="15" name="Rounded Rectangle 14"/>
+          <p:cNvPr id="17" name="Rounded Rectangle 16"/>
           <p:cNvSpPr/>
           <p:nvPr/>
         </p:nvSpPr>
@@ -14756,7 +16181,7 @@
       </p:sp>
       <p:sp>
         <p:nvSpPr>
-          <p:cNvPr id="16" name="Oval 15"/>
+          <p:cNvPr id="18" name="Oval 17"/>
           <p:cNvSpPr/>
           <p:nvPr/>
         </p:nvSpPr>
@@ -14809,7 +16234,7 @@
       </p:sp>
       <p:sp>
         <p:nvSpPr>
-          <p:cNvPr id="17" name="TextBox 16"/>
+          <p:cNvPr id="19" name="TextBox 18"/>
           <p:cNvSpPr txBox="1"/>
           <p:nvPr/>
         </p:nvSpPr>
@@ -14843,7 +16268,7 @@
       </p:sp>
       <p:sp>
         <p:nvSpPr>
-          <p:cNvPr id="18" name="Rounded Rectangle 17"/>
+          <p:cNvPr id="20" name="Rounded Rectangle 19"/>
           <p:cNvSpPr/>
           <p:nvPr/>
         </p:nvSpPr>
@@ -14899,7 +16324,7 @@
       </p:sp>
       <p:sp>
         <p:nvSpPr>
-          <p:cNvPr id="19" name="Oval 18"/>
+          <p:cNvPr id="21" name="Oval 20"/>
           <p:cNvSpPr/>
           <p:nvPr/>
         </p:nvSpPr>
@@ -14952,7 +16377,7 @@
       </p:sp>
       <p:sp>
         <p:nvSpPr>
-          <p:cNvPr id="20" name="TextBox 19"/>
+          <p:cNvPr id="22" name="TextBox 21"/>
           <p:cNvSpPr txBox="1"/>
           <p:nvPr/>
         </p:nvSpPr>
@@ -14986,7 +16411,7 @@
       </p:sp>
       <p:sp>
         <p:nvSpPr>
-          <p:cNvPr id="21" name="Rounded Rectangle 20"/>
+          <p:cNvPr id="23" name="Rounded Rectangle 22"/>
           <p:cNvSpPr/>
           <p:nvPr/>
         </p:nvSpPr>
@@ -15042,7 +16467,7 @@
       </p:sp>
       <p:sp>
         <p:nvSpPr>
-          <p:cNvPr id="22" name="Oval 21"/>
+          <p:cNvPr id="24" name="Oval 23"/>
           <p:cNvSpPr/>
           <p:nvPr/>
         </p:nvSpPr>
@@ -15095,7 +16520,7 @@
       </p:sp>
       <p:sp>
         <p:nvSpPr>
-          <p:cNvPr id="23" name="TextBox 22"/>
+          <p:cNvPr id="25" name="TextBox 24"/>
           <p:cNvSpPr txBox="1"/>
           <p:nvPr/>
         </p:nvSpPr>
@@ -15510,7 +16935,111 @@
       </p:pic>
       <p:sp>
         <p:nvSpPr>
-          <p:cNvPr id="11" name="TextBox 10"/>
+          <p:cNvPr id="11" name="Rounded Rectangle 10"/>
+          <p:cNvSpPr/>
+          <p:nvPr/>
+        </p:nvSpPr>
+        <p:spPr>
+          <a:xfrm>
+            <a:off x="411479" y="1444752"/>
+            <a:ext cx="11368735" cy="4800600"/>
+          </a:xfrm>
+          <a:prstGeom prst="roundRect">
+            <a:avLst>
+              <a:gd name="adj" fmla="val 4000"/>
+            </a:avLst>
+          </a:prstGeom>
+          <a:solidFill>
+            <a:srgbClr val="FFFFFF">
+              <a:alpha val="84000"/>
+            </a:srgbClr>
+          </a:solidFill>
+          <a:ln w="19050">
+            <a:solidFill>
+              <a:srgbClr val="FFFFFF"/>
+            </a:solidFill>
+          </a:ln>
+          <a:effectLst>
+            <a:outerShdw blurRad="203200" dist="50800" dir="5400000" algn="t" rotWithShape="0">
+              <a:srgbClr val="1A2340">
+                <a:alpha val="20000"/>
+              </a:srgbClr>
+            </a:outerShdw>
+          </a:effectLst>
+        </p:spPr>
+        <p:style>
+          <a:lnRef idx="1">
+            <a:schemeClr val="accent1"/>
+          </a:lnRef>
+          <a:fillRef idx="3">
+            <a:schemeClr val="accent1"/>
+          </a:fillRef>
+          <a:effectRef idx="2">
+            <a:schemeClr val="accent1"/>
+          </a:effectRef>
+          <a:fontRef idx="minor">
+            <a:schemeClr val="lt1"/>
+          </a:fontRef>
+        </p:style>
+        <p:txBody>
+          <a:bodyPr rtlCol="0" anchor="ctr"/>
+          <a:lstStyle/>
+          <a:p>
+            <a:pPr algn="ctr"/>
+          </a:p>
+        </p:txBody>
+      </p:sp>
+      <p:sp>
+        <p:nvSpPr>
+          <p:cNvPr id="12" name="Rounded Rectangle 11"/>
+          <p:cNvSpPr/>
+          <p:nvPr/>
+        </p:nvSpPr>
+        <p:spPr>
+          <a:xfrm>
+            <a:off x="731519" y="1508760"/>
+            <a:ext cx="10728655" cy="32004"/>
+          </a:xfrm>
+          <a:prstGeom prst="roundRect">
+            <a:avLst>
+              <a:gd name="adj" fmla="val 50000"/>
+            </a:avLst>
+          </a:prstGeom>
+          <a:solidFill>
+            <a:srgbClr val="FFFFFF">
+              <a:alpha val="85000"/>
+            </a:srgbClr>
+          </a:solidFill>
+          <a:ln>
+            <a:noFill/>
+          </a:ln>
+          <a:effectLst/>
+        </p:spPr>
+        <p:style>
+          <a:lnRef idx="1">
+            <a:schemeClr val="accent1"/>
+          </a:lnRef>
+          <a:fillRef idx="3">
+            <a:schemeClr val="accent1"/>
+          </a:fillRef>
+          <a:effectRef idx="2">
+            <a:schemeClr val="accent1"/>
+          </a:effectRef>
+          <a:fontRef idx="minor">
+            <a:schemeClr val="lt1"/>
+          </a:fontRef>
+        </p:style>
+        <p:txBody>
+          <a:bodyPr rtlCol="0" anchor="ctr"/>
+          <a:lstStyle/>
+          <a:p>
+            <a:pPr algn="ctr"/>
+          </a:p>
+        </p:txBody>
+      </p:sp>
+      <p:sp>
+        <p:nvSpPr>
+          <p:cNvPr id="13" name="TextBox 12"/>
           <p:cNvSpPr txBox="1"/>
           <p:nvPr/>
         </p:nvSpPr>
@@ -15544,7 +17073,7 @@
       </p:sp>
       <p:sp>
         <p:nvSpPr>
-          <p:cNvPr id="12" name="Rounded Rectangle 11"/>
+          <p:cNvPr id="14" name="Rounded Rectangle 13"/>
           <p:cNvSpPr/>
           <p:nvPr/>
         </p:nvSpPr>
@@ -15603,7 +17132,7 @@
       </p:sp>
       <p:sp>
         <p:nvSpPr>
-          <p:cNvPr id="13" name="Oval 12"/>
+          <p:cNvPr id="15" name="Oval 14"/>
           <p:cNvSpPr/>
           <p:nvPr/>
         </p:nvSpPr>
@@ -15656,7 +17185,7 @@
       </p:sp>
       <p:sp>
         <p:nvSpPr>
-          <p:cNvPr id="14" name="TextBox 13"/>
+          <p:cNvPr id="16" name="TextBox 15"/>
           <p:cNvSpPr txBox="1"/>
           <p:nvPr/>
         </p:nvSpPr>
@@ -15690,7 +17219,7 @@
       </p:sp>
       <p:sp>
         <p:nvSpPr>
-          <p:cNvPr id="15" name="Rounded Rectangle 14"/>
+          <p:cNvPr id="17" name="Rounded Rectangle 16"/>
           <p:cNvSpPr/>
           <p:nvPr/>
         </p:nvSpPr>
@@ -15746,7 +17275,7 @@
       </p:sp>
       <p:sp>
         <p:nvSpPr>
-          <p:cNvPr id="16" name="Oval 15"/>
+          <p:cNvPr id="18" name="Oval 17"/>
           <p:cNvSpPr/>
           <p:nvPr/>
         </p:nvSpPr>
@@ -15799,7 +17328,7 @@
       </p:sp>
       <p:sp>
         <p:nvSpPr>
-          <p:cNvPr id="17" name="TextBox 16"/>
+          <p:cNvPr id="19" name="TextBox 18"/>
           <p:cNvSpPr txBox="1"/>
           <p:nvPr/>
         </p:nvSpPr>
@@ -15833,7 +17362,7 @@
       </p:sp>
       <p:sp>
         <p:nvSpPr>
-          <p:cNvPr id="18" name="Rounded Rectangle 17"/>
+          <p:cNvPr id="20" name="Rounded Rectangle 19"/>
           <p:cNvSpPr/>
           <p:nvPr/>
         </p:nvSpPr>
@@ -15889,7 +17418,7 @@
       </p:sp>
       <p:sp>
         <p:nvSpPr>
-          <p:cNvPr id="19" name="Oval 18"/>
+          <p:cNvPr id="21" name="Oval 20"/>
           <p:cNvSpPr/>
           <p:nvPr/>
         </p:nvSpPr>
@@ -15942,7 +17471,7 @@
       </p:sp>
       <p:sp>
         <p:nvSpPr>
-          <p:cNvPr id="20" name="TextBox 19"/>
+          <p:cNvPr id="22" name="TextBox 21"/>
           <p:cNvSpPr txBox="1"/>
           <p:nvPr/>
         </p:nvSpPr>
@@ -15976,7 +17505,7 @@
       </p:sp>
       <p:sp>
         <p:nvSpPr>
-          <p:cNvPr id="21" name="Rounded Rectangle 20"/>
+          <p:cNvPr id="23" name="Rounded Rectangle 22"/>
           <p:cNvSpPr/>
           <p:nvPr/>
         </p:nvSpPr>
@@ -16032,7 +17561,7 @@
       </p:sp>
       <p:sp>
         <p:nvSpPr>
-          <p:cNvPr id="22" name="Oval 21"/>
+          <p:cNvPr id="24" name="Oval 23"/>
           <p:cNvSpPr/>
           <p:nvPr/>
         </p:nvSpPr>
@@ -16085,7 +17614,7 @@
       </p:sp>
       <p:sp>
         <p:nvSpPr>
-          <p:cNvPr id="23" name="TextBox 22"/>
+          <p:cNvPr id="25" name="TextBox 24"/>
           <p:cNvSpPr txBox="1"/>
           <p:nvPr/>
         </p:nvSpPr>
@@ -16119,7 +17648,7 @@
       </p:sp>
       <p:sp>
         <p:nvSpPr>
-          <p:cNvPr id="24" name="TextBox 23"/>
+          <p:cNvPr id="26" name="TextBox 25"/>
           <p:cNvSpPr txBox="1"/>
           <p:nvPr/>
         </p:nvSpPr>
@@ -16543,7 +18072,111 @@
       </p:pic>
       <p:sp>
         <p:nvSpPr>
-          <p:cNvPr id="11" name="TextBox 10"/>
+          <p:cNvPr id="11" name="Rounded Rectangle 10"/>
+          <p:cNvSpPr/>
+          <p:nvPr/>
+        </p:nvSpPr>
+        <p:spPr>
+          <a:xfrm>
+            <a:off x="411479" y="1444752"/>
+            <a:ext cx="11368735" cy="4800600"/>
+          </a:xfrm>
+          <a:prstGeom prst="roundRect">
+            <a:avLst>
+              <a:gd name="adj" fmla="val 4000"/>
+            </a:avLst>
+          </a:prstGeom>
+          <a:solidFill>
+            <a:srgbClr val="FFFFFF">
+              <a:alpha val="84000"/>
+            </a:srgbClr>
+          </a:solidFill>
+          <a:ln w="19050">
+            <a:solidFill>
+              <a:srgbClr val="FFFFFF"/>
+            </a:solidFill>
+          </a:ln>
+          <a:effectLst>
+            <a:outerShdw blurRad="203200" dist="50800" dir="5400000" algn="t" rotWithShape="0">
+              <a:srgbClr val="1A2340">
+                <a:alpha val="20000"/>
+              </a:srgbClr>
+            </a:outerShdw>
+          </a:effectLst>
+        </p:spPr>
+        <p:style>
+          <a:lnRef idx="1">
+            <a:schemeClr val="accent1"/>
+          </a:lnRef>
+          <a:fillRef idx="3">
+            <a:schemeClr val="accent1"/>
+          </a:fillRef>
+          <a:effectRef idx="2">
+            <a:schemeClr val="accent1"/>
+          </a:effectRef>
+          <a:fontRef idx="minor">
+            <a:schemeClr val="lt1"/>
+          </a:fontRef>
+        </p:style>
+        <p:txBody>
+          <a:bodyPr rtlCol="0" anchor="ctr"/>
+          <a:lstStyle/>
+          <a:p>
+            <a:pPr algn="ctr"/>
+          </a:p>
+        </p:txBody>
+      </p:sp>
+      <p:sp>
+        <p:nvSpPr>
+          <p:cNvPr id="12" name="Rounded Rectangle 11"/>
+          <p:cNvSpPr/>
+          <p:nvPr/>
+        </p:nvSpPr>
+        <p:spPr>
+          <a:xfrm>
+            <a:off x="731519" y="1508760"/>
+            <a:ext cx="10728655" cy="32004"/>
+          </a:xfrm>
+          <a:prstGeom prst="roundRect">
+            <a:avLst>
+              <a:gd name="adj" fmla="val 50000"/>
+            </a:avLst>
+          </a:prstGeom>
+          <a:solidFill>
+            <a:srgbClr val="FFFFFF">
+              <a:alpha val="85000"/>
+            </a:srgbClr>
+          </a:solidFill>
+          <a:ln>
+            <a:noFill/>
+          </a:ln>
+          <a:effectLst/>
+        </p:spPr>
+        <p:style>
+          <a:lnRef idx="1">
+            <a:schemeClr val="accent1"/>
+          </a:lnRef>
+          <a:fillRef idx="3">
+            <a:schemeClr val="accent1"/>
+          </a:fillRef>
+          <a:effectRef idx="2">
+            <a:schemeClr val="accent1"/>
+          </a:effectRef>
+          <a:fontRef idx="minor">
+            <a:schemeClr val="lt1"/>
+          </a:fontRef>
+        </p:style>
+        <p:txBody>
+          <a:bodyPr rtlCol="0" anchor="ctr"/>
+          <a:lstStyle/>
+          <a:p>
+            <a:pPr algn="ctr"/>
+          </a:p>
+        </p:txBody>
+      </p:sp>
+      <p:sp>
+        <p:nvSpPr>
+          <p:cNvPr id="13" name="TextBox 12"/>
           <p:cNvSpPr txBox="1"/>
           <p:nvPr/>
         </p:nvSpPr>
@@ -16577,7 +18210,7 @@
       </p:sp>
       <p:sp>
         <p:nvSpPr>
-          <p:cNvPr id="12" name="Rounded Rectangle 11"/>
+          <p:cNvPr id="14" name="Rounded Rectangle 13"/>
           <p:cNvSpPr/>
           <p:nvPr/>
         </p:nvSpPr>
@@ -16633,7 +18266,7 @@
       </p:sp>
       <p:sp>
         <p:nvSpPr>
-          <p:cNvPr id="13" name="Oval 12"/>
+          <p:cNvPr id="15" name="Oval 14"/>
           <p:cNvSpPr/>
           <p:nvPr/>
         </p:nvSpPr>
@@ -16686,7 +18319,7 @@
       </p:sp>
       <p:sp>
         <p:nvSpPr>
-          <p:cNvPr id="14" name="TextBox 13"/>
+          <p:cNvPr id="16" name="TextBox 15"/>
           <p:cNvSpPr txBox="1"/>
           <p:nvPr/>
         </p:nvSpPr>
@@ -16720,7 +18353,7 @@
       </p:sp>
       <p:sp>
         <p:nvSpPr>
-          <p:cNvPr id="15" name="Rounded Rectangle 14"/>
+          <p:cNvPr id="17" name="Rounded Rectangle 16"/>
           <p:cNvSpPr/>
           <p:nvPr/>
         </p:nvSpPr>
@@ -16776,7 +18409,7 @@
       </p:sp>
       <p:sp>
         <p:nvSpPr>
-          <p:cNvPr id="16" name="Oval 15"/>
+          <p:cNvPr id="18" name="Oval 17"/>
           <p:cNvSpPr/>
           <p:nvPr/>
         </p:nvSpPr>
@@ -16829,7 +18462,7 @@
       </p:sp>
       <p:sp>
         <p:nvSpPr>
-          <p:cNvPr id="17" name="TextBox 16"/>
+          <p:cNvPr id="19" name="TextBox 18"/>
           <p:cNvSpPr txBox="1"/>
           <p:nvPr/>
         </p:nvSpPr>
@@ -16863,7 +18496,7 @@
       </p:sp>
       <p:sp>
         <p:nvSpPr>
-          <p:cNvPr id="18" name="Rounded Rectangle 17"/>
+          <p:cNvPr id="20" name="Rounded Rectangle 19"/>
           <p:cNvSpPr/>
           <p:nvPr/>
         </p:nvSpPr>
@@ -16919,7 +18552,7 @@
       </p:sp>
       <p:sp>
         <p:nvSpPr>
-          <p:cNvPr id="19" name="Oval 18"/>
+          <p:cNvPr id="21" name="Oval 20"/>
           <p:cNvSpPr/>
           <p:nvPr/>
         </p:nvSpPr>
@@ -16972,7 +18605,7 @@
       </p:sp>
       <p:sp>
         <p:nvSpPr>
-          <p:cNvPr id="20" name="TextBox 19"/>
+          <p:cNvPr id="22" name="TextBox 21"/>
           <p:cNvSpPr txBox="1"/>
           <p:nvPr/>
         </p:nvSpPr>
@@ -17006,7 +18639,7 @@
       </p:sp>
       <p:sp>
         <p:nvSpPr>
-          <p:cNvPr id="21" name="Rounded Rectangle 20"/>
+          <p:cNvPr id="23" name="Rounded Rectangle 22"/>
           <p:cNvSpPr/>
           <p:nvPr/>
         </p:nvSpPr>
@@ -17062,7 +18695,7 @@
       </p:sp>
       <p:sp>
         <p:nvSpPr>
-          <p:cNvPr id="22" name="Oval 21"/>
+          <p:cNvPr id="24" name="Oval 23"/>
           <p:cNvSpPr/>
           <p:nvPr/>
         </p:nvSpPr>
@@ -17115,7 +18748,7 @@
       </p:sp>
       <p:sp>
         <p:nvSpPr>
-          <p:cNvPr id="23" name="TextBox 22"/>
+          <p:cNvPr id="25" name="TextBox 24"/>
           <p:cNvSpPr txBox="1"/>
           <p:nvPr/>
         </p:nvSpPr>
@@ -17530,7 +19163,111 @@
       </p:pic>
       <p:sp>
         <p:nvSpPr>
-          <p:cNvPr id="11" name="TextBox 10"/>
+          <p:cNvPr id="11" name="Rounded Rectangle 10"/>
+          <p:cNvSpPr/>
+          <p:nvPr/>
+        </p:nvSpPr>
+        <p:spPr>
+          <a:xfrm>
+            <a:off x="411479" y="1444752"/>
+            <a:ext cx="11368735" cy="4800600"/>
+          </a:xfrm>
+          <a:prstGeom prst="roundRect">
+            <a:avLst>
+              <a:gd name="adj" fmla="val 4000"/>
+            </a:avLst>
+          </a:prstGeom>
+          <a:solidFill>
+            <a:srgbClr val="FFFFFF">
+              <a:alpha val="84000"/>
+            </a:srgbClr>
+          </a:solidFill>
+          <a:ln w="19050">
+            <a:solidFill>
+              <a:srgbClr val="FFFFFF"/>
+            </a:solidFill>
+          </a:ln>
+          <a:effectLst>
+            <a:outerShdw blurRad="203200" dist="50800" dir="5400000" algn="t" rotWithShape="0">
+              <a:srgbClr val="1A2340">
+                <a:alpha val="20000"/>
+              </a:srgbClr>
+            </a:outerShdw>
+          </a:effectLst>
+        </p:spPr>
+        <p:style>
+          <a:lnRef idx="1">
+            <a:schemeClr val="accent1"/>
+          </a:lnRef>
+          <a:fillRef idx="3">
+            <a:schemeClr val="accent1"/>
+          </a:fillRef>
+          <a:effectRef idx="2">
+            <a:schemeClr val="accent1"/>
+          </a:effectRef>
+          <a:fontRef idx="minor">
+            <a:schemeClr val="lt1"/>
+          </a:fontRef>
+        </p:style>
+        <p:txBody>
+          <a:bodyPr rtlCol="0" anchor="ctr"/>
+          <a:lstStyle/>
+          <a:p>
+            <a:pPr algn="ctr"/>
+          </a:p>
+        </p:txBody>
+      </p:sp>
+      <p:sp>
+        <p:nvSpPr>
+          <p:cNvPr id="12" name="Rounded Rectangle 11"/>
+          <p:cNvSpPr/>
+          <p:nvPr/>
+        </p:nvSpPr>
+        <p:spPr>
+          <a:xfrm>
+            <a:off x="731519" y="1508760"/>
+            <a:ext cx="10728655" cy="32004"/>
+          </a:xfrm>
+          <a:prstGeom prst="roundRect">
+            <a:avLst>
+              <a:gd name="adj" fmla="val 50000"/>
+            </a:avLst>
+          </a:prstGeom>
+          <a:solidFill>
+            <a:srgbClr val="FFFFFF">
+              <a:alpha val="85000"/>
+            </a:srgbClr>
+          </a:solidFill>
+          <a:ln>
+            <a:noFill/>
+          </a:ln>
+          <a:effectLst/>
+        </p:spPr>
+        <p:style>
+          <a:lnRef idx="1">
+            <a:schemeClr val="accent1"/>
+          </a:lnRef>
+          <a:fillRef idx="3">
+            <a:schemeClr val="accent1"/>
+          </a:fillRef>
+          <a:effectRef idx="2">
+            <a:schemeClr val="accent1"/>
+          </a:effectRef>
+          <a:fontRef idx="minor">
+            <a:schemeClr val="lt1"/>
+          </a:fontRef>
+        </p:style>
+        <p:txBody>
+          <a:bodyPr rtlCol="0" anchor="ctr"/>
+          <a:lstStyle/>
+          <a:p>
+            <a:pPr algn="ctr"/>
+          </a:p>
+        </p:txBody>
+      </p:sp>
+      <p:sp>
+        <p:nvSpPr>
+          <p:cNvPr id="13" name="TextBox 12"/>
           <p:cNvSpPr txBox="1"/>
           <p:nvPr/>
         </p:nvSpPr>
@@ -17564,7 +19301,7 @@
       </p:sp>
       <p:sp>
         <p:nvSpPr>
-          <p:cNvPr id="12" name="Rounded Rectangle 11"/>
+          <p:cNvPr id="14" name="Rounded Rectangle 13"/>
           <p:cNvSpPr/>
           <p:nvPr/>
         </p:nvSpPr>
@@ -17620,7 +19357,7 @@
       </p:sp>
       <p:sp>
         <p:nvSpPr>
-          <p:cNvPr id="13" name="Oval 12"/>
+          <p:cNvPr id="15" name="Oval 14"/>
           <p:cNvSpPr/>
           <p:nvPr/>
         </p:nvSpPr>
@@ -17673,7 +19410,7 @@
       </p:sp>
       <p:sp>
         <p:nvSpPr>
-          <p:cNvPr id="14" name="TextBox 13"/>
+          <p:cNvPr id="16" name="TextBox 15"/>
           <p:cNvSpPr txBox="1"/>
           <p:nvPr/>
         </p:nvSpPr>
@@ -17707,7 +19444,7 @@
       </p:sp>
       <p:sp>
         <p:nvSpPr>
-          <p:cNvPr id="15" name="Rounded Rectangle 14"/>
+          <p:cNvPr id="17" name="Rounded Rectangle 16"/>
           <p:cNvSpPr/>
           <p:nvPr/>
         </p:nvSpPr>
@@ -17763,7 +19500,7 @@
       </p:sp>
       <p:sp>
         <p:nvSpPr>
-          <p:cNvPr id="16" name="Oval 15"/>
+          <p:cNvPr id="18" name="Oval 17"/>
           <p:cNvSpPr/>
           <p:nvPr/>
         </p:nvSpPr>
@@ -17816,7 +19553,7 @@
       </p:sp>
       <p:sp>
         <p:nvSpPr>
-          <p:cNvPr id="17" name="TextBox 16"/>
+          <p:cNvPr id="19" name="TextBox 18"/>
           <p:cNvSpPr txBox="1"/>
           <p:nvPr/>
         </p:nvSpPr>
@@ -17850,7 +19587,7 @@
       </p:sp>
       <p:sp>
         <p:nvSpPr>
-          <p:cNvPr id="18" name="Rounded Rectangle 17"/>
+          <p:cNvPr id="20" name="Rounded Rectangle 19"/>
           <p:cNvSpPr/>
           <p:nvPr/>
         </p:nvSpPr>
@@ -17906,7 +19643,7 @@
       </p:sp>
       <p:sp>
         <p:nvSpPr>
-          <p:cNvPr id="19" name="Oval 18"/>
+          <p:cNvPr id="21" name="Oval 20"/>
           <p:cNvSpPr/>
           <p:nvPr/>
         </p:nvSpPr>
@@ -17959,7 +19696,7 @@
       </p:sp>
       <p:sp>
         <p:nvSpPr>
-          <p:cNvPr id="20" name="TextBox 19"/>
+          <p:cNvPr id="22" name="TextBox 21"/>
           <p:cNvSpPr txBox="1"/>
           <p:nvPr/>
         </p:nvSpPr>
@@ -17993,7 +19730,7 @@
       </p:sp>
       <p:sp>
         <p:nvSpPr>
-          <p:cNvPr id="21" name="Rounded Rectangle 20"/>
+          <p:cNvPr id="23" name="Rounded Rectangle 22"/>
           <p:cNvSpPr/>
           <p:nvPr/>
         </p:nvSpPr>
@@ -18052,7 +19789,7 @@
       </p:sp>
       <p:sp>
         <p:nvSpPr>
-          <p:cNvPr id="22" name="Oval 21"/>
+          <p:cNvPr id="24" name="Oval 23"/>
           <p:cNvSpPr/>
           <p:nvPr/>
         </p:nvSpPr>
@@ -18105,7 +19842,7 @@
       </p:sp>
       <p:sp>
         <p:nvSpPr>
-          <p:cNvPr id="23" name="TextBox 22"/>
+          <p:cNvPr id="25" name="TextBox 24"/>
           <p:cNvSpPr txBox="1"/>
           <p:nvPr/>
         </p:nvSpPr>
@@ -18139,7 +19876,7 @@
       </p:sp>
       <p:sp>
         <p:nvSpPr>
-          <p:cNvPr id="24" name="TextBox 23"/>
+          <p:cNvPr id="26" name="TextBox 25"/>
           <p:cNvSpPr txBox="1"/>
           <p:nvPr/>
         </p:nvSpPr>
@@ -19164,7 +20901,111 @@
       </p:pic>
       <p:sp>
         <p:nvSpPr>
-          <p:cNvPr id="11" name="Oval 10"/>
+          <p:cNvPr id="11" name="Rounded Rectangle 10"/>
+          <p:cNvSpPr/>
+          <p:nvPr/>
+        </p:nvSpPr>
+        <p:spPr>
+          <a:xfrm>
+            <a:off x="411479" y="1444752"/>
+            <a:ext cx="11368735" cy="4800600"/>
+          </a:xfrm>
+          <a:prstGeom prst="roundRect">
+            <a:avLst>
+              <a:gd name="adj" fmla="val 4000"/>
+            </a:avLst>
+          </a:prstGeom>
+          <a:solidFill>
+            <a:srgbClr val="FFFFFF">
+              <a:alpha val="84000"/>
+            </a:srgbClr>
+          </a:solidFill>
+          <a:ln w="19050">
+            <a:solidFill>
+              <a:srgbClr val="FFFFFF"/>
+            </a:solidFill>
+          </a:ln>
+          <a:effectLst>
+            <a:outerShdw blurRad="203200" dist="50800" dir="5400000" algn="t" rotWithShape="0">
+              <a:srgbClr val="1A2340">
+                <a:alpha val="20000"/>
+              </a:srgbClr>
+            </a:outerShdw>
+          </a:effectLst>
+        </p:spPr>
+        <p:style>
+          <a:lnRef idx="1">
+            <a:schemeClr val="accent1"/>
+          </a:lnRef>
+          <a:fillRef idx="3">
+            <a:schemeClr val="accent1"/>
+          </a:fillRef>
+          <a:effectRef idx="2">
+            <a:schemeClr val="accent1"/>
+          </a:effectRef>
+          <a:fontRef idx="minor">
+            <a:schemeClr val="lt1"/>
+          </a:fontRef>
+        </p:style>
+        <p:txBody>
+          <a:bodyPr rtlCol="0" anchor="ctr"/>
+          <a:lstStyle/>
+          <a:p>
+            <a:pPr algn="ctr"/>
+          </a:p>
+        </p:txBody>
+      </p:sp>
+      <p:sp>
+        <p:nvSpPr>
+          <p:cNvPr id="12" name="Rounded Rectangle 11"/>
+          <p:cNvSpPr/>
+          <p:nvPr/>
+        </p:nvSpPr>
+        <p:spPr>
+          <a:xfrm>
+            <a:off x="731519" y="1508760"/>
+            <a:ext cx="10728655" cy="32004"/>
+          </a:xfrm>
+          <a:prstGeom prst="roundRect">
+            <a:avLst>
+              <a:gd name="adj" fmla="val 50000"/>
+            </a:avLst>
+          </a:prstGeom>
+          <a:solidFill>
+            <a:srgbClr val="FFFFFF">
+              <a:alpha val="85000"/>
+            </a:srgbClr>
+          </a:solidFill>
+          <a:ln>
+            <a:noFill/>
+          </a:ln>
+          <a:effectLst/>
+        </p:spPr>
+        <p:style>
+          <a:lnRef idx="1">
+            <a:schemeClr val="accent1"/>
+          </a:lnRef>
+          <a:fillRef idx="3">
+            <a:schemeClr val="accent1"/>
+          </a:fillRef>
+          <a:effectRef idx="2">
+            <a:schemeClr val="accent1"/>
+          </a:effectRef>
+          <a:fontRef idx="minor">
+            <a:schemeClr val="lt1"/>
+          </a:fontRef>
+        </p:style>
+        <p:txBody>
+          <a:bodyPr rtlCol="0" anchor="ctr"/>
+          <a:lstStyle/>
+          <a:p>
+            <a:pPr algn="ctr"/>
+          </a:p>
+        </p:txBody>
+      </p:sp>
+      <p:sp>
+        <p:nvSpPr>
+          <p:cNvPr id="13" name="Oval 12"/>
           <p:cNvSpPr/>
           <p:nvPr/>
         </p:nvSpPr>
@@ -19217,7 +21058,7 @@
       </p:sp>
       <p:sp>
         <p:nvSpPr>
-          <p:cNvPr id="12" name="TextBox 11"/>
+          <p:cNvPr id="14" name="TextBox 13"/>
           <p:cNvSpPr txBox="1"/>
           <p:nvPr/>
         </p:nvSpPr>
@@ -19251,7 +21092,7 @@
       </p:sp>
       <p:sp>
         <p:nvSpPr>
-          <p:cNvPr id="13" name="Oval 12"/>
+          <p:cNvPr id="15" name="Oval 14"/>
           <p:cNvSpPr/>
           <p:nvPr/>
         </p:nvSpPr>
@@ -19304,7 +21145,7 @@
       </p:sp>
       <p:sp>
         <p:nvSpPr>
-          <p:cNvPr id="14" name="TextBox 13"/>
+          <p:cNvPr id="16" name="TextBox 15"/>
           <p:cNvSpPr txBox="1"/>
           <p:nvPr/>
         </p:nvSpPr>
@@ -19338,7 +21179,7 @@
       </p:sp>
       <p:sp>
         <p:nvSpPr>
-          <p:cNvPr id="15" name="Oval 14"/>
+          <p:cNvPr id="17" name="Oval 16"/>
           <p:cNvSpPr/>
           <p:nvPr/>
         </p:nvSpPr>
@@ -19391,7 +21232,7 @@
       </p:sp>
       <p:sp>
         <p:nvSpPr>
-          <p:cNvPr id="16" name="TextBox 15"/>
+          <p:cNvPr id="18" name="TextBox 17"/>
           <p:cNvSpPr txBox="1"/>
           <p:nvPr/>
         </p:nvSpPr>
@@ -19425,7 +21266,7 @@
       </p:sp>
       <p:sp>
         <p:nvSpPr>
-          <p:cNvPr id="17" name="Oval 16"/>
+          <p:cNvPr id="19" name="Oval 18"/>
           <p:cNvSpPr/>
           <p:nvPr/>
         </p:nvSpPr>
@@ -19478,7 +21319,7 @@
       </p:sp>
       <p:sp>
         <p:nvSpPr>
-          <p:cNvPr id="18" name="TextBox 17"/>
+          <p:cNvPr id="20" name="TextBox 19"/>
           <p:cNvSpPr txBox="1"/>
           <p:nvPr/>
         </p:nvSpPr>
@@ -19512,7 +21353,7 @@
       </p:sp>
       <p:sp>
         <p:nvSpPr>
-          <p:cNvPr id="19" name="Oval 18"/>
+          <p:cNvPr id="21" name="Oval 20"/>
           <p:cNvSpPr/>
           <p:nvPr/>
         </p:nvSpPr>
@@ -19565,7 +21406,7 @@
       </p:sp>
       <p:sp>
         <p:nvSpPr>
-          <p:cNvPr id="20" name="TextBox 19"/>
+          <p:cNvPr id="22" name="TextBox 21"/>
           <p:cNvSpPr txBox="1"/>
           <p:nvPr/>
         </p:nvSpPr>
@@ -19599,7 +21440,7 @@
       </p:sp>
       <p:sp>
         <p:nvSpPr>
-          <p:cNvPr id="21" name="Oval 20"/>
+          <p:cNvPr id="23" name="Oval 22"/>
           <p:cNvSpPr/>
           <p:nvPr/>
         </p:nvSpPr>
@@ -19652,7 +21493,7 @@
       </p:sp>
       <p:sp>
         <p:nvSpPr>
-          <p:cNvPr id="22" name="TextBox 21"/>
+          <p:cNvPr id="24" name="TextBox 23"/>
           <p:cNvSpPr txBox="1"/>
           <p:nvPr/>
         </p:nvSpPr>
@@ -19686,7 +21527,7 @@
       </p:sp>
       <p:sp>
         <p:nvSpPr>
-          <p:cNvPr id="23" name="Oval 22"/>
+          <p:cNvPr id="25" name="Oval 24"/>
           <p:cNvSpPr/>
           <p:nvPr/>
         </p:nvSpPr>
@@ -19739,7 +21580,7 @@
       </p:sp>
       <p:sp>
         <p:nvSpPr>
-          <p:cNvPr id="24" name="TextBox 23"/>
+          <p:cNvPr id="26" name="TextBox 25"/>
           <p:cNvSpPr txBox="1"/>
           <p:nvPr/>
         </p:nvSpPr>
@@ -19773,7 +21614,7 @@
       </p:sp>
       <p:sp>
         <p:nvSpPr>
-          <p:cNvPr id="25" name="Oval 24"/>
+          <p:cNvPr id="27" name="Oval 26"/>
           <p:cNvSpPr/>
           <p:nvPr/>
         </p:nvSpPr>
@@ -19826,7 +21667,7 @@
       </p:sp>
       <p:sp>
         <p:nvSpPr>
-          <p:cNvPr id="26" name="TextBox 25"/>
+          <p:cNvPr id="28" name="TextBox 27"/>
           <p:cNvSpPr txBox="1"/>
           <p:nvPr/>
         </p:nvSpPr>
@@ -20241,7 +22082,111 @@
       </p:pic>
       <p:sp>
         <p:nvSpPr>
-          <p:cNvPr id="11" name="Oval 10"/>
+          <p:cNvPr id="11" name="Rounded Rectangle 10"/>
+          <p:cNvSpPr/>
+          <p:nvPr/>
+        </p:nvSpPr>
+        <p:spPr>
+          <a:xfrm>
+            <a:off x="411479" y="1444752"/>
+            <a:ext cx="11368735" cy="4800600"/>
+          </a:xfrm>
+          <a:prstGeom prst="roundRect">
+            <a:avLst>
+              <a:gd name="adj" fmla="val 4000"/>
+            </a:avLst>
+          </a:prstGeom>
+          <a:solidFill>
+            <a:srgbClr val="FFFFFF">
+              <a:alpha val="84000"/>
+            </a:srgbClr>
+          </a:solidFill>
+          <a:ln w="19050">
+            <a:solidFill>
+              <a:srgbClr val="FFFFFF"/>
+            </a:solidFill>
+          </a:ln>
+          <a:effectLst>
+            <a:outerShdw blurRad="203200" dist="50800" dir="5400000" algn="t" rotWithShape="0">
+              <a:srgbClr val="1A2340">
+                <a:alpha val="20000"/>
+              </a:srgbClr>
+            </a:outerShdw>
+          </a:effectLst>
+        </p:spPr>
+        <p:style>
+          <a:lnRef idx="1">
+            <a:schemeClr val="accent1"/>
+          </a:lnRef>
+          <a:fillRef idx="3">
+            <a:schemeClr val="accent1"/>
+          </a:fillRef>
+          <a:effectRef idx="2">
+            <a:schemeClr val="accent1"/>
+          </a:effectRef>
+          <a:fontRef idx="minor">
+            <a:schemeClr val="lt1"/>
+          </a:fontRef>
+        </p:style>
+        <p:txBody>
+          <a:bodyPr rtlCol="0" anchor="ctr"/>
+          <a:lstStyle/>
+          <a:p>
+            <a:pPr algn="ctr"/>
+          </a:p>
+        </p:txBody>
+      </p:sp>
+      <p:sp>
+        <p:nvSpPr>
+          <p:cNvPr id="12" name="Rounded Rectangle 11"/>
+          <p:cNvSpPr/>
+          <p:nvPr/>
+        </p:nvSpPr>
+        <p:spPr>
+          <a:xfrm>
+            <a:off x="731519" y="1508760"/>
+            <a:ext cx="10728655" cy="32004"/>
+          </a:xfrm>
+          <a:prstGeom prst="roundRect">
+            <a:avLst>
+              <a:gd name="adj" fmla="val 50000"/>
+            </a:avLst>
+          </a:prstGeom>
+          <a:solidFill>
+            <a:srgbClr val="FFFFFF">
+              <a:alpha val="85000"/>
+            </a:srgbClr>
+          </a:solidFill>
+          <a:ln>
+            <a:noFill/>
+          </a:ln>
+          <a:effectLst/>
+        </p:spPr>
+        <p:style>
+          <a:lnRef idx="1">
+            <a:schemeClr val="accent1"/>
+          </a:lnRef>
+          <a:fillRef idx="3">
+            <a:schemeClr val="accent1"/>
+          </a:fillRef>
+          <a:effectRef idx="2">
+            <a:schemeClr val="accent1"/>
+          </a:effectRef>
+          <a:fontRef idx="minor">
+            <a:schemeClr val="lt1"/>
+          </a:fontRef>
+        </p:style>
+        <p:txBody>
+          <a:bodyPr rtlCol="0" anchor="ctr"/>
+          <a:lstStyle/>
+          <a:p>
+            <a:pPr algn="ctr"/>
+          </a:p>
+        </p:txBody>
+      </p:sp>
+      <p:sp>
+        <p:nvSpPr>
+          <p:cNvPr id="13" name="Oval 12"/>
           <p:cNvSpPr/>
           <p:nvPr/>
         </p:nvSpPr>
@@ -20294,7 +22239,7 @@
       </p:sp>
       <p:sp>
         <p:nvSpPr>
-          <p:cNvPr id="12" name="TextBox 11"/>
+          <p:cNvPr id="14" name="TextBox 13"/>
           <p:cNvSpPr txBox="1"/>
           <p:nvPr/>
         </p:nvSpPr>
@@ -20346,7 +22291,7 @@
       </p:sp>
       <p:sp>
         <p:nvSpPr>
-          <p:cNvPr id="13" name="Oval 12"/>
+          <p:cNvPr id="15" name="Oval 14"/>
           <p:cNvSpPr/>
           <p:nvPr/>
         </p:nvSpPr>
@@ -20399,7 +22344,7 @@
       </p:sp>
       <p:sp>
         <p:nvSpPr>
-          <p:cNvPr id="14" name="TextBox 13"/>
+          <p:cNvPr id="16" name="TextBox 15"/>
           <p:cNvSpPr txBox="1"/>
           <p:nvPr/>
         </p:nvSpPr>
@@ -20812,9 +22757,167 @@
           </a:prstGeom>
         </p:spPr>
       </p:pic>
+      <p:sp>
+        <p:nvSpPr>
+          <p:cNvPr id="11" name="Rounded Rectangle 10"/>
+          <p:cNvSpPr/>
+          <p:nvPr/>
+        </p:nvSpPr>
+        <p:spPr>
+          <a:xfrm>
+            <a:off x="411479" y="1444752"/>
+            <a:ext cx="11368735" cy="4800600"/>
+          </a:xfrm>
+          <a:prstGeom prst="roundRect">
+            <a:avLst>
+              <a:gd name="adj" fmla="val 4000"/>
+            </a:avLst>
+          </a:prstGeom>
+          <a:solidFill>
+            <a:srgbClr val="FFFFFF">
+              <a:alpha val="84000"/>
+            </a:srgbClr>
+          </a:solidFill>
+          <a:ln w="19050">
+            <a:solidFill>
+              <a:srgbClr val="FFFFFF"/>
+            </a:solidFill>
+          </a:ln>
+          <a:effectLst>
+            <a:outerShdw blurRad="203200" dist="50800" dir="5400000" algn="t" rotWithShape="0">
+              <a:srgbClr val="1A2340">
+                <a:alpha val="20000"/>
+              </a:srgbClr>
+            </a:outerShdw>
+          </a:effectLst>
+        </p:spPr>
+        <p:style>
+          <a:lnRef idx="1">
+            <a:schemeClr val="accent1"/>
+          </a:lnRef>
+          <a:fillRef idx="3">
+            <a:schemeClr val="accent1"/>
+          </a:fillRef>
+          <a:effectRef idx="2">
+            <a:schemeClr val="accent1"/>
+          </a:effectRef>
+          <a:fontRef idx="minor">
+            <a:schemeClr val="lt1"/>
+          </a:fontRef>
+        </p:style>
+        <p:txBody>
+          <a:bodyPr rtlCol="0" anchor="ctr"/>
+          <a:lstStyle/>
+          <a:p>
+            <a:pPr algn="ctr"/>
+          </a:p>
+        </p:txBody>
+      </p:sp>
+      <p:sp>
+        <p:nvSpPr>
+          <p:cNvPr id="12" name="Rounded Rectangle 11"/>
+          <p:cNvSpPr/>
+          <p:nvPr/>
+        </p:nvSpPr>
+        <p:spPr>
+          <a:xfrm>
+            <a:off x="731519" y="1508760"/>
+            <a:ext cx="10728655" cy="32004"/>
+          </a:xfrm>
+          <a:prstGeom prst="roundRect">
+            <a:avLst>
+              <a:gd name="adj" fmla="val 50000"/>
+            </a:avLst>
+          </a:prstGeom>
+          <a:solidFill>
+            <a:srgbClr val="FFFFFF">
+              <a:alpha val="85000"/>
+            </a:srgbClr>
+          </a:solidFill>
+          <a:ln>
+            <a:noFill/>
+          </a:ln>
+          <a:effectLst/>
+        </p:spPr>
+        <p:style>
+          <a:lnRef idx="1">
+            <a:schemeClr val="accent1"/>
+          </a:lnRef>
+          <a:fillRef idx="3">
+            <a:schemeClr val="accent1"/>
+          </a:fillRef>
+          <a:effectRef idx="2">
+            <a:schemeClr val="accent1"/>
+          </a:effectRef>
+          <a:fontRef idx="minor">
+            <a:schemeClr val="lt1"/>
+          </a:fontRef>
+        </p:style>
+        <p:txBody>
+          <a:bodyPr rtlCol="0" anchor="ctr"/>
+          <a:lstStyle/>
+          <a:p>
+            <a:pPr algn="ctr"/>
+          </a:p>
+        </p:txBody>
+      </p:sp>
+      <p:sp>
+        <p:nvSpPr>
+          <p:cNvPr id="13" name="Rounded Rectangle 12"/>
+          <p:cNvSpPr/>
+          <p:nvPr/>
+        </p:nvSpPr>
+        <p:spPr>
+          <a:xfrm>
+            <a:off x="548640" y="1554480"/>
+            <a:ext cx="11094415" cy="4617720"/>
+          </a:xfrm>
+          <a:prstGeom prst="roundRect">
+            <a:avLst>
+              <a:gd name="adj" fmla="val 3000"/>
+            </a:avLst>
+          </a:prstGeom>
+          <a:solidFill>
+            <a:srgbClr val="FFFFFF"/>
+          </a:solidFill>
+          <a:ln w="9525">
+            <a:solidFill>
+              <a:srgbClr val="DDDFEE"/>
+            </a:solidFill>
+          </a:ln>
+          <a:effectLst>
+            <a:outerShdw blurRad="203200" dist="50800" dir="5400000" algn="t" rotWithShape="0">
+              <a:srgbClr val="1A2340">
+                <a:alpha val="20000"/>
+              </a:srgbClr>
+            </a:outerShdw>
+          </a:effectLst>
+        </p:spPr>
+        <p:style>
+          <a:lnRef idx="1">
+            <a:schemeClr val="accent1"/>
+          </a:lnRef>
+          <a:fillRef idx="3">
+            <a:schemeClr val="accent1"/>
+          </a:fillRef>
+          <a:effectRef idx="2">
+            <a:schemeClr val="accent1"/>
+          </a:effectRef>
+          <a:fontRef idx="minor">
+            <a:schemeClr val="lt1"/>
+          </a:fontRef>
+        </p:style>
+        <p:txBody>
+          <a:bodyPr rtlCol="0" anchor="ctr"/>
+          <a:lstStyle/>
+          <a:p>
+            <a:pPr algn="ctr"/>
+          </a:p>
+        </p:txBody>
+      </p:sp>
       <p:pic>
         <p:nvPicPr>
-          <p:cNvPr id="11" name="Picture 10" descr="Outside the nerve the drug exists as base and cation. The unionised base crosses the lipid membrane; inside, it becomes ionised and binds the inner side of the Na+ channel. Acidic tissue leaves more drug ionised outside."/>
+          <p:cNvPr id="14" name="Picture 13" descr="Outside the nerve the drug exists as base and cation. The unionised base crosses the lipid membrane; inside, it becomes ionised and binds the inner side of the Na+ channel. Acidic tissue leaves more drug ionised outside."/>
           <p:cNvPicPr>
             <a:picLocks noChangeAspect="1"/>
           </p:cNvPicPr>
@@ -20828,8 +22931,8 @@
         </p:blipFill>
         <p:spPr>
           <a:xfrm>
-            <a:off x="1638917" y="1554480"/>
-            <a:ext cx="8913860" cy="4160520"/>
+            <a:off x="1834828" y="1664207"/>
+            <a:ext cx="8522039" cy="3977639"/>
           </a:xfrm>
           <a:prstGeom prst="rect">
             <a:avLst/>
@@ -20838,14 +22941,14 @@
       </p:pic>
       <p:sp>
         <p:nvSpPr>
-          <p:cNvPr id="12" name="TextBox 11"/>
+          <p:cNvPr id="15" name="TextBox 14"/>
           <p:cNvSpPr txBox="1"/>
           <p:nvPr/>
         </p:nvSpPr>
         <p:spPr>
           <a:xfrm>
-            <a:off x="548640" y="5806440"/>
-            <a:ext cx="11094415" cy="365760"/>
+            <a:off x="685800" y="5733287"/>
+            <a:ext cx="10820095" cy="365760"/>
           </a:xfrm>
           <a:prstGeom prst="rect">
             <a:avLst/>
@@ -21254,14 +23357,177 @@
       </p:pic>
       <p:sp>
         <p:nvSpPr>
-          <p:cNvPr id="11" name="TextBox 10"/>
+          <p:cNvPr id="11" name="Rounded Rectangle 10"/>
+          <p:cNvSpPr/>
+          <p:nvPr/>
+        </p:nvSpPr>
+        <p:spPr>
+          <a:xfrm>
+            <a:off x="411479" y="1444752"/>
+            <a:ext cx="11368735" cy="4800600"/>
+          </a:xfrm>
+          <a:prstGeom prst="roundRect">
+            <a:avLst>
+              <a:gd name="adj" fmla="val 4000"/>
+            </a:avLst>
+          </a:prstGeom>
+          <a:solidFill>
+            <a:srgbClr val="FFFFFF">
+              <a:alpha val="84000"/>
+            </a:srgbClr>
+          </a:solidFill>
+          <a:ln w="19050">
+            <a:solidFill>
+              <a:srgbClr val="FFFFFF"/>
+            </a:solidFill>
+          </a:ln>
+          <a:effectLst>
+            <a:outerShdw blurRad="203200" dist="50800" dir="5400000" algn="t" rotWithShape="0">
+              <a:srgbClr val="1A2340">
+                <a:alpha val="20000"/>
+              </a:srgbClr>
+            </a:outerShdw>
+          </a:effectLst>
+        </p:spPr>
+        <p:style>
+          <a:lnRef idx="1">
+            <a:schemeClr val="accent1"/>
+          </a:lnRef>
+          <a:fillRef idx="3">
+            <a:schemeClr val="accent1"/>
+          </a:fillRef>
+          <a:effectRef idx="2">
+            <a:schemeClr val="accent1"/>
+          </a:effectRef>
+          <a:fontRef idx="minor">
+            <a:schemeClr val="lt1"/>
+          </a:fontRef>
+        </p:style>
+        <p:txBody>
+          <a:bodyPr rtlCol="0" anchor="ctr"/>
+          <a:lstStyle/>
+          <a:p>
+            <a:pPr algn="ctr"/>
+          </a:p>
+        </p:txBody>
+      </p:sp>
+      <p:sp>
+        <p:nvSpPr>
+          <p:cNvPr id="12" name="Rounded Rectangle 11"/>
+          <p:cNvSpPr/>
+          <p:nvPr/>
+        </p:nvSpPr>
+        <p:spPr>
+          <a:xfrm>
+            <a:off x="731519" y="1508760"/>
+            <a:ext cx="10728655" cy="32004"/>
+          </a:xfrm>
+          <a:prstGeom prst="roundRect">
+            <a:avLst>
+              <a:gd name="adj" fmla="val 50000"/>
+            </a:avLst>
+          </a:prstGeom>
+          <a:solidFill>
+            <a:srgbClr val="FFFFFF">
+              <a:alpha val="85000"/>
+            </a:srgbClr>
+          </a:solidFill>
+          <a:ln>
+            <a:noFill/>
+          </a:ln>
+          <a:effectLst/>
+        </p:spPr>
+        <p:style>
+          <a:lnRef idx="1">
+            <a:schemeClr val="accent1"/>
+          </a:lnRef>
+          <a:fillRef idx="3">
+            <a:schemeClr val="accent1"/>
+          </a:fillRef>
+          <a:effectRef idx="2">
+            <a:schemeClr val="accent1"/>
+          </a:effectRef>
+          <a:fontRef idx="minor">
+            <a:schemeClr val="lt1"/>
+          </a:fontRef>
+        </p:style>
+        <p:txBody>
+          <a:bodyPr rtlCol="0" anchor="ctr"/>
+          <a:lstStyle/>
+          <a:p>
+            <a:pPr algn="ctr"/>
+          </a:p>
+        </p:txBody>
+      </p:sp>
+      <p:sp>
+        <p:nvSpPr>
+          <p:cNvPr id="13" name="Rounded Rectangle 12"/>
+          <p:cNvSpPr/>
+          <p:nvPr/>
+        </p:nvSpPr>
+        <p:spPr>
+          <a:xfrm>
+            <a:off x="548640" y="1591056"/>
+            <a:ext cx="64008" cy="594360"/>
+          </a:xfrm>
+          <a:prstGeom prst="roundRect">
+            <a:avLst>
+              <a:gd name="adj" fmla="val 50000"/>
+            </a:avLst>
+          </a:prstGeom>
+          <a:solidFill>
+            <a:srgbClr val="8D6A2A"/>
+          </a:solidFill>
+          <a:ln>
+            <a:noFill/>
+          </a:ln>
+          <a:effectLst>
+            <a:outerShdw blurRad="203200" dist="50800" dir="5400000" algn="t" rotWithShape="0">
+              <a:srgbClr val="1A2340">
+                <a:alpha val="20000"/>
+              </a:srgbClr>
+            </a:outerShdw>
+          </a:effectLst>
+          <a:scene3d>
+            <a:camera prst="orthographicFront"/>
+            <a:lightRig rig="threePt" dir="t"/>
+          </a:scene3d>
+          <a:sp3d>
+            <a:bevelT w="44450" h="25400" prst="softRound"/>
+          </a:sp3d>
+        </p:spPr>
+        <p:style>
+          <a:lnRef idx="1">
+            <a:schemeClr val="accent1"/>
+          </a:lnRef>
+          <a:fillRef idx="3">
+            <a:schemeClr val="accent1"/>
+          </a:fillRef>
+          <a:effectRef idx="2">
+            <a:schemeClr val="accent1"/>
+          </a:effectRef>
+          <a:fontRef idx="minor">
+            <a:schemeClr val="lt1"/>
+          </a:fontRef>
+        </p:style>
+        <p:txBody>
+          <a:bodyPr rtlCol="0" anchor="ctr"/>
+          <a:lstStyle/>
+          <a:p>
+            <a:pPr algn="ctr"/>
+          </a:p>
+        </p:txBody>
+      </p:sp>
+      <p:sp>
+        <p:nvSpPr>
+          <p:cNvPr id="14" name="TextBox 13"/>
           <p:cNvSpPr txBox="1"/>
           <p:nvPr/>
         </p:nvSpPr>
         <p:spPr>
           <a:xfrm>
-            <a:off x="548640" y="1554480"/>
-            <a:ext cx="11094415" cy="795528"/>
+            <a:off x="777240" y="1554480"/>
+            <a:ext cx="10865815" cy="795528"/>
           </a:xfrm>
           <a:prstGeom prst="rect">
             <a:avLst/>
@@ -21293,7 +23559,7 @@
       </p:sp>
       <p:sp>
         <p:nvSpPr>
-          <p:cNvPr id="12" name="Oval 11"/>
+          <p:cNvPr id="15" name="Oval 14"/>
           <p:cNvSpPr/>
           <p:nvPr/>
         </p:nvSpPr>
@@ -21346,7 +23612,7 @@
       </p:sp>
       <p:sp>
         <p:nvSpPr>
-          <p:cNvPr id="13" name="TextBox 12"/>
+          <p:cNvPr id="16" name="TextBox 15"/>
           <p:cNvSpPr txBox="1"/>
           <p:nvPr/>
         </p:nvSpPr>
@@ -21380,7 +23646,7 @@
       </p:sp>
       <p:sp>
         <p:nvSpPr>
-          <p:cNvPr id="14" name="Oval 13"/>
+          <p:cNvPr id="17" name="Oval 16"/>
           <p:cNvSpPr/>
           <p:nvPr/>
         </p:nvSpPr>
@@ -21433,7 +23699,7 @@
       </p:sp>
       <p:sp>
         <p:nvSpPr>
-          <p:cNvPr id="15" name="TextBox 14"/>
+          <p:cNvPr id="18" name="TextBox 17"/>
           <p:cNvSpPr txBox="1"/>
           <p:nvPr/>
         </p:nvSpPr>
@@ -21485,7 +23751,7 @@
       </p:sp>
       <p:sp>
         <p:nvSpPr>
-          <p:cNvPr id="16" name="Oval 15"/>
+          <p:cNvPr id="19" name="Oval 18"/>
           <p:cNvSpPr/>
           <p:nvPr/>
         </p:nvSpPr>
@@ -21538,7 +23804,7 @@
       </p:sp>
       <p:sp>
         <p:nvSpPr>
-          <p:cNvPr id="17" name="TextBox 16"/>
+          <p:cNvPr id="20" name="TextBox 19"/>
           <p:cNvSpPr txBox="1"/>
           <p:nvPr/>
         </p:nvSpPr>
@@ -21590,7 +23856,7 @@
       </p:sp>
       <p:sp>
         <p:nvSpPr>
-          <p:cNvPr id="18" name="Oval 17"/>
+          <p:cNvPr id="21" name="Oval 20"/>
           <p:cNvSpPr/>
           <p:nvPr/>
         </p:nvSpPr>
@@ -21643,7 +23909,7 @@
       </p:sp>
       <p:sp>
         <p:nvSpPr>
-          <p:cNvPr id="19" name="TextBox 18"/>
+          <p:cNvPr id="22" name="TextBox 21"/>
           <p:cNvSpPr txBox="1"/>
           <p:nvPr/>
         </p:nvSpPr>
@@ -21743,6 +24009,110 @@
           </a:prstGeom>
         </p:spPr>
       </p:pic>
+      <p:sp>
+        <p:nvSpPr>
+          <p:cNvPr id="10" name="Rounded Rectangle 9"/>
+          <p:cNvSpPr/>
+          <p:nvPr/>
+        </p:nvSpPr>
+        <p:spPr>
+          <a:xfrm>
+            <a:off x="4251960" y="548640"/>
+            <a:ext cx="7635240" cy="5715000"/>
+          </a:xfrm>
+          <a:prstGeom prst="roundRect">
+            <a:avLst>
+              <a:gd name="adj" fmla="val 4000"/>
+            </a:avLst>
+          </a:prstGeom>
+          <a:solidFill>
+            <a:srgbClr val="FFFFFF">
+              <a:alpha val="84000"/>
+            </a:srgbClr>
+          </a:solidFill>
+          <a:ln w="19050">
+            <a:solidFill>
+              <a:srgbClr val="FFFFFF"/>
+            </a:solidFill>
+          </a:ln>
+          <a:effectLst>
+            <a:outerShdw blurRad="203200" dist="50800" dir="5400000" algn="t" rotWithShape="0">
+              <a:srgbClr val="1A2340">
+                <a:alpha val="20000"/>
+              </a:srgbClr>
+            </a:outerShdw>
+          </a:effectLst>
+        </p:spPr>
+        <p:style>
+          <a:lnRef idx="1">
+            <a:schemeClr val="accent1"/>
+          </a:lnRef>
+          <a:fillRef idx="3">
+            <a:schemeClr val="accent1"/>
+          </a:fillRef>
+          <a:effectRef idx="2">
+            <a:schemeClr val="accent1"/>
+          </a:effectRef>
+          <a:fontRef idx="minor">
+            <a:schemeClr val="lt1"/>
+          </a:fontRef>
+        </p:style>
+        <p:txBody>
+          <a:bodyPr rtlCol="0" anchor="ctr"/>
+          <a:lstStyle/>
+          <a:p>
+            <a:pPr algn="ctr"/>
+          </a:p>
+        </p:txBody>
+      </p:sp>
+      <p:sp>
+        <p:nvSpPr>
+          <p:cNvPr id="11" name="Rounded Rectangle 10"/>
+          <p:cNvSpPr/>
+          <p:nvPr/>
+        </p:nvSpPr>
+        <p:spPr>
+          <a:xfrm>
+            <a:off x="4572000" y="612647"/>
+            <a:ext cx="6995159" cy="32004"/>
+          </a:xfrm>
+          <a:prstGeom prst="roundRect">
+            <a:avLst>
+              <a:gd name="adj" fmla="val 50000"/>
+            </a:avLst>
+          </a:prstGeom>
+          <a:solidFill>
+            <a:srgbClr val="FFFFFF">
+              <a:alpha val="85000"/>
+            </a:srgbClr>
+          </a:solidFill>
+          <a:ln>
+            <a:noFill/>
+          </a:ln>
+          <a:effectLst/>
+        </p:spPr>
+        <p:style>
+          <a:lnRef idx="1">
+            <a:schemeClr val="accent1"/>
+          </a:lnRef>
+          <a:fillRef idx="3">
+            <a:schemeClr val="accent1"/>
+          </a:fillRef>
+          <a:effectRef idx="2">
+            <a:schemeClr val="accent1"/>
+          </a:effectRef>
+          <a:fontRef idx="minor">
+            <a:schemeClr val="lt1"/>
+          </a:fontRef>
+        </p:style>
+        <p:txBody>
+          <a:bodyPr rtlCol="0" anchor="ctr"/>
+          <a:lstStyle/>
+          <a:p>
+            <a:pPr algn="ctr"/>
+          </a:p>
+        </p:txBody>
+      </p:sp>
       <p:sp>
         <p:nvSpPr>
           <p:cNvPr id="3" name="Rectangle 2"/>
@@ -22399,14 +24769,177 @@
       </p:pic>
       <p:sp>
         <p:nvSpPr>
-          <p:cNvPr id="11" name="TextBox 10"/>
+          <p:cNvPr id="11" name="Rounded Rectangle 10"/>
+          <p:cNvSpPr/>
+          <p:nvPr/>
+        </p:nvSpPr>
+        <p:spPr>
+          <a:xfrm>
+            <a:off x="411479" y="1444752"/>
+            <a:ext cx="11368735" cy="4800600"/>
+          </a:xfrm>
+          <a:prstGeom prst="roundRect">
+            <a:avLst>
+              <a:gd name="adj" fmla="val 4000"/>
+            </a:avLst>
+          </a:prstGeom>
+          <a:solidFill>
+            <a:srgbClr val="FFFFFF">
+              <a:alpha val="84000"/>
+            </a:srgbClr>
+          </a:solidFill>
+          <a:ln w="19050">
+            <a:solidFill>
+              <a:srgbClr val="FFFFFF"/>
+            </a:solidFill>
+          </a:ln>
+          <a:effectLst>
+            <a:outerShdw blurRad="203200" dist="50800" dir="5400000" algn="t" rotWithShape="0">
+              <a:srgbClr val="1A2340">
+                <a:alpha val="20000"/>
+              </a:srgbClr>
+            </a:outerShdw>
+          </a:effectLst>
+        </p:spPr>
+        <p:style>
+          <a:lnRef idx="1">
+            <a:schemeClr val="accent1"/>
+          </a:lnRef>
+          <a:fillRef idx="3">
+            <a:schemeClr val="accent1"/>
+          </a:fillRef>
+          <a:effectRef idx="2">
+            <a:schemeClr val="accent1"/>
+          </a:effectRef>
+          <a:fontRef idx="minor">
+            <a:schemeClr val="lt1"/>
+          </a:fontRef>
+        </p:style>
+        <p:txBody>
+          <a:bodyPr rtlCol="0" anchor="ctr"/>
+          <a:lstStyle/>
+          <a:p>
+            <a:pPr algn="ctr"/>
+          </a:p>
+        </p:txBody>
+      </p:sp>
+      <p:sp>
+        <p:nvSpPr>
+          <p:cNvPr id="12" name="Rounded Rectangle 11"/>
+          <p:cNvSpPr/>
+          <p:nvPr/>
+        </p:nvSpPr>
+        <p:spPr>
+          <a:xfrm>
+            <a:off x="731519" y="1508760"/>
+            <a:ext cx="10728655" cy="32004"/>
+          </a:xfrm>
+          <a:prstGeom prst="roundRect">
+            <a:avLst>
+              <a:gd name="adj" fmla="val 50000"/>
+            </a:avLst>
+          </a:prstGeom>
+          <a:solidFill>
+            <a:srgbClr val="FFFFFF">
+              <a:alpha val="85000"/>
+            </a:srgbClr>
+          </a:solidFill>
+          <a:ln>
+            <a:noFill/>
+          </a:ln>
+          <a:effectLst/>
+        </p:spPr>
+        <p:style>
+          <a:lnRef idx="1">
+            <a:schemeClr val="accent1"/>
+          </a:lnRef>
+          <a:fillRef idx="3">
+            <a:schemeClr val="accent1"/>
+          </a:fillRef>
+          <a:effectRef idx="2">
+            <a:schemeClr val="accent1"/>
+          </a:effectRef>
+          <a:fontRef idx="minor">
+            <a:schemeClr val="lt1"/>
+          </a:fontRef>
+        </p:style>
+        <p:txBody>
+          <a:bodyPr rtlCol="0" anchor="ctr"/>
+          <a:lstStyle/>
+          <a:p>
+            <a:pPr algn="ctr"/>
+          </a:p>
+        </p:txBody>
+      </p:sp>
+      <p:sp>
+        <p:nvSpPr>
+          <p:cNvPr id="13" name="Rounded Rectangle 12"/>
+          <p:cNvSpPr/>
+          <p:nvPr/>
+        </p:nvSpPr>
+        <p:spPr>
+          <a:xfrm>
+            <a:off x="548640" y="1591056"/>
+            <a:ext cx="64008" cy="594360"/>
+          </a:xfrm>
+          <a:prstGeom prst="roundRect">
+            <a:avLst>
+              <a:gd name="adj" fmla="val 50000"/>
+            </a:avLst>
+          </a:prstGeom>
+          <a:solidFill>
+            <a:srgbClr val="8D6A2A"/>
+          </a:solidFill>
+          <a:ln>
+            <a:noFill/>
+          </a:ln>
+          <a:effectLst>
+            <a:outerShdw blurRad="203200" dist="50800" dir="5400000" algn="t" rotWithShape="0">
+              <a:srgbClr val="1A2340">
+                <a:alpha val="20000"/>
+              </a:srgbClr>
+            </a:outerShdw>
+          </a:effectLst>
+          <a:scene3d>
+            <a:camera prst="orthographicFront"/>
+            <a:lightRig rig="threePt" dir="t"/>
+          </a:scene3d>
+          <a:sp3d>
+            <a:bevelT w="44450" h="25400" prst="softRound"/>
+          </a:sp3d>
+        </p:spPr>
+        <p:style>
+          <a:lnRef idx="1">
+            <a:schemeClr val="accent1"/>
+          </a:lnRef>
+          <a:fillRef idx="3">
+            <a:schemeClr val="accent1"/>
+          </a:fillRef>
+          <a:effectRef idx="2">
+            <a:schemeClr val="accent1"/>
+          </a:effectRef>
+          <a:fontRef idx="minor">
+            <a:schemeClr val="lt1"/>
+          </a:fontRef>
+        </p:style>
+        <p:txBody>
+          <a:bodyPr rtlCol="0" anchor="ctr"/>
+          <a:lstStyle/>
+          <a:p>
+            <a:pPr algn="ctr"/>
+          </a:p>
+        </p:txBody>
+      </p:sp>
+      <p:sp>
+        <p:nvSpPr>
+          <p:cNvPr id="14" name="TextBox 13"/>
           <p:cNvSpPr txBox="1"/>
           <p:nvPr/>
         </p:nvSpPr>
         <p:spPr>
           <a:xfrm>
-            <a:off x="548640" y="1554480"/>
-            <a:ext cx="11094415" cy="795528"/>
+            <a:off x="777240" y="1554480"/>
+            <a:ext cx="10865815" cy="795528"/>
           </a:xfrm>
           <a:prstGeom prst="rect">
             <a:avLst/>
@@ -22474,7 +25007,7 @@
       </p:sp>
       <p:graphicFrame>
         <p:nvGraphicFramePr>
-          <p:cNvPr id="12" name="Table 11"/>
+          <p:cNvPr id="15" name="Table 14"/>
           <p:cNvGraphicFramePr>
             <a:graphicFrameLocks noGrp="1"/>
           </p:cNvGraphicFramePr>
@@ -23290,14 +25823,177 @@
       </p:pic>
       <p:sp>
         <p:nvSpPr>
-          <p:cNvPr id="11" name="TextBox 10"/>
+          <p:cNvPr id="11" name="Rounded Rectangle 10"/>
+          <p:cNvSpPr/>
+          <p:nvPr/>
+        </p:nvSpPr>
+        <p:spPr>
+          <a:xfrm>
+            <a:off x="411479" y="1444752"/>
+            <a:ext cx="11368735" cy="4800600"/>
+          </a:xfrm>
+          <a:prstGeom prst="roundRect">
+            <a:avLst>
+              <a:gd name="adj" fmla="val 4000"/>
+            </a:avLst>
+          </a:prstGeom>
+          <a:solidFill>
+            <a:srgbClr val="FFFFFF">
+              <a:alpha val="84000"/>
+            </a:srgbClr>
+          </a:solidFill>
+          <a:ln w="19050">
+            <a:solidFill>
+              <a:srgbClr val="FFFFFF"/>
+            </a:solidFill>
+          </a:ln>
+          <a:effectLst>
+            <a:outerShdw blurRad="203200" dist="50800" dir="5400000" algn="t" rotWithShape="0">
+              <a:srgbClr val="1A2340">
+                <a:alpha val="20000"/>
+              </a:srgbClr>
+            </a:outerShdw>
+          </a:effectLst>
+        </p:spPr>
+        <p:style>
+          <a:lnRef idx="1">
+            <a:schemeClr val="accent1"/>
+          </a:lnRef>
+          <a:fillRef idx="3">
+            <a:schemeClr val="accent1"/>
+          </a:fillRef>
+          <a:effectRef idx="2">
+            <a:schemeClr val="accent1"/>
+          </a:effectRef>
+          <a:fontRef idx="minor">
+            <a:schemeClr val="lt1"/>
+          </a:fontRef>
+        </p:style>
+        <p:txBody>
+          <a:bodyPr rtlCol="0" anchor="ctr"/>
+          <a:lstStyle/>
+          <a:p>
+            <a:pPr algn="ctr"/>
+          </a:p>
+        </p:txBody>
+      </p:sp>
+      <p:sp>
+        <p:nvSpPr>
+          <p:cNvPr id="12" name="Rounded Rectangle 11"/>
+          <p:cNvSpPr/>
+          <p:nvPr/>
+        </p:nvSpPr>
+        <p:spPr>
+          <a:xfrm>
+            <a:off x="731519" y="1508760"/>
+            <a:ext cx="10728655" cy="32004"/>
+          </a:xfrm>
+          <a:prstGeom prst="roundRect">
+            <a:avLst>
+              <a:gd name="adj" fmla="val 50000"/>
+            </a:avLst>
+          </a:prstGeom>
+          <a:solidFill>
+            <a:srgbClr val="FFFFFF">
+              <a:alpha val="85000"/>
+            </a:srgbClr>
+          </a:solidFill>
+          <a:ln>
+            <a:noFill/>
+          </a:ln>
+          <a:effectLst/>
+        </p:spPr>
+        <p:style>
+          <a:lnRef idx="1">
+            <a:schemeClr val="accent1"/>
+          </a:lnRef>
+          <a:fillRef idx="3">
+            <a:schemeClr val="accent1"/>
+          </a:fillRef>
+          <a:effectRef idx="2">
+            <a:schemeClr val="accent1"/>
+          </a:effectRef>
+          <a:fontRef idx="minor">
+            <a:schemeClr val="lt1"/>
+          </a:fontRef>
+        </p:style>
+        <p:txBody>
+          <a:bodyPr rtlCol="0" anchor="ctr"/>
+          <a:lstStyle/>
+          <a:p>
+            <a:pPr algn="ctr"/>
+          </a:p>
+        </p:txBody>
+      </p:sp>
+      <p:sp>
+        <p:nvSpPr>
+          <p:cNvPr id="13" name="Rounded Rectangle 12"/>
+          <p:cNvSpPr/>
+          <p:nvPr/>
+        </p:nvSpPr>
+        <p:spPr>
+          <a:xfrm>
+            <a:off x="548640" y="1591056"/>
+            <a:ext cx="64008" cy="315468"/>
+          </a:xfrm>
+          <a:prstGeom prst="roundRect">
+            <a:avLst>
+              <a:gd name="adj" fmla="val 50000"/>
+            </a:avLst>
+          </a:prstGeom>
+          <a:solidFill>
+            <a:srgbClr val="8D6A2A"/>
+          </a:solidFill>
+          <a:ln>
+            <a:noFill/>
+          </a:ln>
+          <a:effectLst>
+            <a:outerShdw blurRad="203200" dist="50800" dir="5400000" algn="t" rotWithShape="0">
+              <a:srgbClr val="1A2340">
+                <a:alpha val="20000"/>
+              </a:srgbClr>
+            </a:outerShdw>
+          </a:effectLst>
+          <a:scene3d>
+            <a:camera prst="orthographicFront"/>
+            <a:lightRig rig="threePt" dir="t"/>
+          </a:scene3d>
+          <a:sp3d>
+            <a:bevelT w="44450" h="25400" prst="softRound"/>
+          </a:sp3d>
+        </p:spPr>
+        <p:style>
+          <a:lnRef idx="1">
+            <a:schemeClr val="accent1"/>
+          </a:lnRef>
+          <a:fillRef idx="3">
+            <a:schemeClr val="accent1"/>
+          </a:fillRef>
+          <a:effectRef idx="2">
+            <a:schemeClr val="accent1"/>
+          </a:effectRef>
+          <a:fontRef idx="minor">
+            <a:schemeClr val="lt1"/>
+          </a:fontRef>
+        </p:style>
+        <p:txBody>
+          <a:bodyPr rtlCol="0" anchor="ctr"/>
+          <a:lstStyle/>
+          <a:p>
+            <a:pPr algn="ctr"/>
+          </a:p>
+        </p:txBody>
+      </p:sp>
+      <p:sp>
+        <p:nvSpPr>
+          <p:cNvPr id="14" name="TextBox 13"/>
           <p:cNvSpPr txBox="1"/>
           <p:nvPr/>
         </p:nvSpPr>
         <p:spPr>
           <a:xfrm>
-            <a:off x="548640" y="1554480"/>
-            <a:ext cx="11094415" cy="498348"/>
+            <a:off x="777240" y="1554480"/>
+            <a:ext cx="10865815" cy="498348"/>
           </a:xfrm>
           <a:prstGeom prst="rect">
             <a:avLst/>
@@ -23329,7 +26025,7 @@
       </p:sp>
       <p:sp>
         <p:nvSpPr>
-          <p:cNvPr id="12" name="Oval 11"/>
+          <p:cNvPr id="15" name="Oval 14"/>
           <p:cNvSpPr/>
           <p:nvPr/>
         </p:nvSpPr>
@@ -23382,7 +26078,7 @@
       </p:sp>
       <p:sp>
         <p:nvSpPr>
-          <p:cNvPr id="13" name="TextBox 12"/>
+          <p:cNvPr id="16" name="TextBox 15"/>
           <p:cNvSpPr txBox="1"/>
           <p:nvPr/>
         </p:nvSpPr>
@@ -23425,7 +26121,7 @@
       </p:sp>
       <p:sp>
         <p:nvSpPr>
-          <p:cNvPr id="14" name="Oval 13"/>
+          <p:cNvPr id="17" name="Oval 16"/>
           <p:cNvSpPr/>
           <p:nvPr/>
         </p:nvSpPr>
@@ -23478,7 +26174,7 @@
       </p:sp>
       <p:sp>
         <p:nvSpPr>
-          <p:cNvPr id="15" name="TextBox 14"/>
+          <p:cNvPr id="18" name="TextBox 17"/>
           <p:cNvSpPr txBox="1"/>
           <p:nvPr/>
         </p:nvSpPr>
@@ -23539,7 +26235,7 @@
       </p:sp>
       <p:sp>
         <p:nvSpPr>
-          <p:cNvPr id="16" name="Oval 15"/>
+          <p:cNvPr id="19" name="Oval 18"/>
           <p:cNvSpPr/>
           <p:nvPr/>
         </p:nvSpPr>
@@ -23592,7 +26288,7 @@
       </p:sp>
       <p:sp>
         <p:nvSpPr>
-          <p:cNvPr id="17" name="TextBox 16"/>
+          <p:cNvPr id="20" name="TextBox 19"/>
           <p:cNvSpPr txBox="1"/>
           <p:nvPr/>
         </p:nvSpPr>
@@ -23635,7 +26331,7 @@
       </p:sp>
       <p:sp>
         <p:nvSpPr>
-          <p:cNvPr id="18" name="Oval 17"/>
+          <p:cNvPr id="21" name="Oval 20"/>
           <p:cNvSpPr/>
           <p:nvPr/>
         </p:nvSpPr>
@@ -23688,7 +26384,7 @@
       </p:sp>
       <p:sp>
         <p:nvSpPr>
-          <p:cNvPr id="19" name="TextBox 18"/>
+          <p:cNvPr id="22" name="TextBox 21"/>
           <p:cNvSpPr txBox="1"/>
           <p:nvPr/>
         </p:nvSpPr>
@@ -23731,7 +26427,7 @@
       </p:sp>
       <p:sp>
         <p:nvSpPr>
-          <p:cNvPr id="20" name="Oval 19"/>
+          <p:cNvPr id="23" name="Oval 22"/>
           <p:cNvSpPr/>
           <p:nvPr/>
         </p:nvSpPr>
@@ -23784,7 +26480,7 @@
       </p:sp>
       <p:sp>
         <p:nvSpPr>
-          <p:cNvPr id="21" name="TextBox 20"/>
+          <p:cNvPr id="24" name="TextBox 23"/>
           <p:cNvSpPr txBox="1"/>
           <p:nvPr/>
         </p:nvSpPr>
@@ -23827,7 +26523,7 @@
       </p:sp>
       <p:sp>
         <p:nvSpPr>
-          <p:cNvPr id="22" name="Oval 21"/>
+          <p:cNvPr id="25" name="Oval 24"/>
           <p:cNvSpPr/>
           <p:nvPr/>
         </p:nvSpPr>
@@ -23880,7 +26576,7 @@
       </p:sp>
       <p:sp>
         <p:nvSpPr>
-          <p:cNvPr id="23" name="TextBox 22"/>
+          <p:cNvPr id="26" name="TextBox 25"/>
           <p:cNvSpPr txBox="1"/>
           <p:nvPr/>
         </p:nvSpPr>
